--- a/rooted_slides.pptx
+++ b/rooted_slides.pptx
@@ -2,17 +2,17 @@
 <file path=ppt/presentation.xml><?xml version="1.0" encoding="utf-8"?>
 <p:presentation xmlns:a="http://schemas.openxmlformats.org/drawingml/2006/main" xmlns:r="http://schemas.openxmlformats.org/officeDocument/2006/relationships" xmlns:p="http://schemas.openxmlformats.org/presentationml/2006/main" saveSubsetFonts="1" autoCompressPictures="0">
   <p:sldMasterIdLst>
-    <p:sldMasterId id="2147483648" r:id="rId1"/>
+    <p:sldMasterId id="2147483648" r:id="rId4"/>
   </p:sldMasterIdLst>
   <p:notesMasterIdLst>
-    <p:notesMasterId r:id="rId7"/>
+    <p:notesMasterId r:id="rId10"/>
   </p:notesMasterIdLst>
   <p:sldIdLst>
-    <p:sldId id="256" r:id="rId2"/>
-    <p:sldId id="257" r:id="rId3"/>
-    <p:sldId id="261" r:id="rId4"/>
-    <p:sldId id="263" r:id="rId5"/>
-    <p:sldId id="266" r:id="rId6"/>
+    <p:sldId id="256" r:id="rId5"/>
+    <p:sldId id="257" r:id="rId6"/>
+    <p:sldId id="261" r:id="rId7"/>
+    <p:sldId id="263" r:id="rId8"/>
+    <p:sldId id="267" r:id="rId9"/>
   </p:sldIdLst>
   <p:sldSz cx="12192000" cy="6858000"/>
   <p:notesSz cx="6858000" cy="12192000"/>
@@ -114,6 +114,35 @@
     </p:ext>
   </p:extLst>
 </p:presentation>
+</file>
+
+<file path=ppt/revisionInfo.xml><?xml version="1.0" encoding="utf-8"?>
+<p1510:revInfo xmlns:a="http://schemas.openxmlformats.org/drawingml/2006/main" xmlns:r="http://schemas.openxmlformats.org/officeDocument/2006/relationships" xmlns:p1510="http://schemas.microsoft.com/office/powerpoint/2015/10/main">
+  <p1510:revLst>
+    <p1510:client id="{C3705DE9-7EB7-4545-BEE0-93706622BEA1}" v="2" dt="2026-10-15T19:04:30.754"/>
+  </p1510:revLst>
+</p1510:revInfo>
+</file>
+
+<file path=ppt/changesInfos/changesInfo1.xml><?xml version="1.0" encoding="utf-8"?>
+<pc:chgInfo xmlns:a="http://schemas.openxmlformats.org/drawingml/2006/main" xmlns:r="http://schemas.openxmlformats.org/officeDocument/2006/relationships" xmlns:ac="http://schemas.microsoft.com/office/drawing/2013/main/command" xmlns:pc="http://schemas.microsoft.com/office/powerpoint/2013/main/command">
+  <pc:docChgLst>
+    <pc:chgData name="Lian, Brenton" userId="e0b78948-1dca-4480-ac23-0bfd98d5596f" providerId="ADAL" clId="{4C6CE92E-4DA1-4337-9B1A-3D391919FAEA}"/>
+    <pc:docChg chg="addSld modSld">
+      <pc:chgData name="Lian, Brenton" userId="e0b78948-1dca-4480-ac23-0bfd98d5596f" providerId="ADAL" clId="{4C6CE92E-4DA1-4337-9B1A-3D391919FAEA}" dt="2026-10-15T19:04:21.978" v="0"/>
+      <pc:docMkLst>
+        <pc:docMk/>
+      </pc:docMkLst>
+      <pc:sldChg chg="add">
+        <pc:chgData name="Lian, Brenton" userId="e0b78948-1dca-4480-ac23-0bfd98d5596f" providerId="ADAL" clId="{4C6CE92E-4DA1-4337-9B1A-3D391919FAEA}" dt="2026-10-15T19:04:21.978" v="0"/>
+        <pc:sldMkLst>
+          <pc:docMk/>
+          <pc:sldMk cId="0" sldId="267"/>
+        </pc:sldMkLst>
+      </pc:sldChg>
+    </pc:docChg>
+  </pc:docChgLst>
+</pc:chgInfo>
 </file>
 
 <file path=ppt/notesMasters/notesMaster1.xml><?xml version="1.0" encoding="utf-8"?>
@@ -613,7 +642,7 @@
             <a:spLocks noGrp="1" noRot="1" noChangeAspect="1"/>
           </p:cNvSpPr>
           <p:nvPr>
-            <p:ph type="sldImg"/>
+            <p:ph type="sldImg" idx="2"/>
           </p:nvPr>
         </p:nvSpPr>
         <p:spPr/>
@@ -625,7 +654,7 @@
             <a:spLocks noGrp="1"/>
           </p:cNvSpPr>
           <p:nvPr>
-            <p:ph type="body" idx="1"/>
+            <p:ph type="body" sz="quarter" idx="3"/>
           </p:nvPr>
         </p:nvSpPr>
         <p:spPr/>
@@ -634,8 +663,7 @@
           <a:lstStyle/>
           <a:p>
             <a:r>
-              <a:rPr lang="en-US" dirty="0"/>
-              <a:t>Suggested time: 50 seconds. Separate MVP and production carefully. The current MVP has no accounts, local user data, Zod validation, source-dated packs and saved lessons. The production roadmap includes EU residency, zero trust, encryption, observability, human reviews and regulatory mapping including GDPR, DORA, EU AI Act and accessibility. These are intended goals, not deployed systems.</a:t>
+              <a:t>Enterprise scalability strategy (proposed, not MVP): Keep the deterministic game, budgeting inputs, and profile in the browser to avoid scaling a stateful game backend. Deploy a containerized, stateless Next.js API to autoscaling Cloud Run behind an HTTPS load balancer, Cloud CDN and Cloud Armor. Serve approved lesson objects from cache and a shared versioned catalog (Cloud Storage + Firestore). Generate and translate lessons asynchronously with Cloud Tasks and a hosted model in the appropriate data-residency region; apply schema checks, source attribution, and human financial-content review before publication. Enterprise guardrails: least-privilege IAM, secrets, observability, error and latency SLOs, rate/instance caps, canary deployments and rollback. Start in one EU region and add failover and enterprise SSO based on requirements and demand. Public lesson caching never includes individual financial inputs. This is an architecture proposal, not a claim of deployed infrastructure.</a:t>
             </a:r>
           </a:p>
         </p:txBody>
@@ -647,28 +675,12 @@
             <a:spLocks noGrp="1"/>
           </p:cNvSpPr>
           <p:nvPr>
-            <p:ph type="sldNum" sz="quarter" idx="10"/>
+            <p:ph type="sldNum" sz="quarter" idx="5"/>
           </p:nvPr>
         </p:nvSpPr>
         <p:spPr/>
-        <p:txBody>
-          <a:bodyPr/>
-          <a:lstStyle/>
-          <a:p>
-            <a:fld id="{F7021451-1387-4CA6-816F-3879F97B5CBC}" type="slidenum">
-              <a:rPr lang="en-US"/>
-              <a:t>5</a:t>
-            </a:fld>
-            <a:endParaRPr lang="en-US"/>
-          </a:p>
-        </p:txBody>
       </p:sp>
     </p:spTree>
-    <p:extLst>
-      <p:ext uri="{BB962C8B-B14F-4D97-AF65-F5344CB8AC3E}">
-        <p14:creationId xmlns:p14="http://schemas.microsoft.com/office/powerpoint/2010/main" val="1024086991"/>
-      </p:ext>
-    </p:extLst>
   </p:cSld>
   <p:clrMapOvr>
     <a:masterClrMapping/>
@@ -706,6 +718,101 @@
 </p:sldLayout>
 </file>
 
+<file path=ppt/slideLayouts/slideLayout2.xml><?xml version="1.0" encoding="utf-8"?>
+<p:sldLayout xmlns:a="http://schemas.openxmlformats.org/drawingml/2006/main" xmlns:r="http://schemas.openxmlformats.org/officeDocument/2006/relationships" xmlns:p="http://schemas.openxmlformats.org/presentationml/2006/main" type="blank">
+  <p:cSld name="Blank">
+    <p:spTree>
+      <p:nvGrpSpPr>
+        <p:cNvPr id="1" name=""/>
+        <p:cNvGrpSpPr/>
+        <p:nvPr/>
+      </p:nvGrpSpPr>
+      <p:grpSpPr>
+        <a:xfrm>
+          <a:off x="0" y="0"/>
+          <a:ext cx="0" cy="0"/>
+          <a:chOff x="0" y="0"/>
+          <a:chExt cx="0" cy="0"/>
+        </a:xfrm>
+      </p:grpSpPr>
+      <p:sp>
+        <p:nvSpPr>
+          <p:cNvPr id="2" name="Date Placeholder 1"/>
+          <p:cNvSpPr>
+            <a:spLocks noGrp="1"/>
+          </p:cNvSpPr>
+          <p:nvPr>
+            <p:ph type="dt" sz="half" idx="10"/>
+          </p:nvPr>
+        </p:nvSpPr>
+        <p:spPr/>
+        <p:txBody>
+          <a:bodyPr/>
+          <a:lstStyle/>
+          <a:p>
+            <a:fld id="{5BCAD085-E8A6-8845-BD4E-CB4CCA059FC4}" type="datetimeFigureOut">
+              <a:rPr lang="en-US" smtClean="0"/>
+              <a:t>10/15/2026</a:t>
+            </a:fld>
+            <a:endParaRPr lang="en-US"/>
+          </a:p>
+        </p:txBody>
+      </p:sp>
+      <p:sp>
+        <p:nvSpPr>
+          <p:cNvPr id="3" name="Footer Placeholder 2"/>
+          <p:cNvSpPr>
+            <a:spLocks noGrp="1"/>
+          </p:cNvSpPr>
+          <p:nvPr>
+            <p:ph type="ftr" sz="quarter" idx="11"/>
+          </p:nvPr>
+        </p:nvSpPr>
+        <p:spPr/>
+        <p:txBody>
+          <a:bodyPr/>
+          <a:lstStyle/>
+          <a:p>
+            <a:endParaRPr lang="en-US"/>
+          </a:p>
+        </p:txBody>
+      </p:sp>
+      <p:sp>
+        <p:nvSpPr>
+          <p:cNvPr id="4" name="Slide Number Placeholder 3"/>
+          <p:cNvSpPr>
+            <a:spLocks noGrp="1"/>
+          </p:cNvSpPr>
+          <p:nvPr>
+            <p:ph type="sldNum" sz="quarter" idx="12"/>
+          </p:nvPr>
+        </p:nvSpPr>
+        <p:spPr/>
+        <p:txBody>
+          <a:bodyPr/>
+          <a:lstStyle/>
+          <a:p>
+            <a:fld id="{C1FF6DA9-008F-8B48-92A6-B652298478BF}" type="slidenum">
+              <a:rPr lang="en-US" smtClean="0"/>
+              <a:t>‹#›</a:t>
+            </a:fld>
+            <a:endParaRPr lang="en-US"/>
+          </a:p>
+        </p:txBody>
+      </p:sp>
+    </p:spTree>
+    <p:extLst>
+      <p:ext uri="{BB962C8B-B14F-4D97-AF65-F5344CB8AC3E}">
+        <p14:creationId xmlns:p14="http://schemas.microsoft.com/office/powerpoint/2010/main" val="3890129297"/>
+      </p:ext>
+    </p:extLst>
+  </p:cSld>
+  <p:clrMapOvr>
+    <a:masterClrMapping/>
+  </p:clrMapOvr>
+</p:sldLayout>
+</file>
+
 <file path=ppt/slideMasters/slideMaster1.xml><?xml version="1.0" encoding="utf-8"?>
 <p:sldMaster xmlns:a="http://schemas.openxmlformats.org/drawingml/2006/main" xmlns:r="http://schemas.openxmlformats.org/officeDocument/2006/relationships" xmlns:p="http://schemas.openxmlformats.org/presentationml/2006/main">
   <p:cSld>
@@ -733,6 +840,7 @@
   <p:clrMap bg1="lt1" tx1="dk1" bg2="lt2" tx2="dk2" accent1="accent1" accent2="accent2" accent3="accent3" accent4="accent4" accent5="accent5" accent6="accent6" hlink="hlink" folHlink="folHlink"/>
   <p:sldLayoutIdLst>
     <p:sldLayoutId id="2147483649" r:id="rId1"/>
+    <p:sldLayoutId id="2147483650" r:id="rId2"/>
   </p:sldLayoutIdLst>
   <p:hf sldNum="0" hdr="0" ftr="0" dt="0"/>
   <p:txStyles>
@@ -2426,7 +2534,7 @@
         </p:spPr>
         <p:txBody>
           <a:bodyPr wrap="square" lIns="0" tIns="0" rIns="0" bIns="0" rtlCol="0" anchor="ctr">
-            <a:normAutofit/>
+            <a:normAutofit lnSpcReduction="10000"/>
           </a:bodyPr>
           <a:lstStyle/>
           <a:p>
@@ -2621,7 +2729,7 @@
         </p:spPr>
         <p:txBody>
           <a:bodyPr wrap="square" lIns="0" tIns="0" rIns="0" bIns="0" rtlCol="0" anchor="ctr">
-            <a:normAutofit/>
+            <a:normAutofit lnSpcReduction="10000"/>
           </a:bodyPr>
           <a:lstStyle/>
           <a:p>
@@ -2703,7 +2811,7 @@
         </p:spPr>
         <p:txBody>
           <a:bodyPr wrap="square" lIns="0" tIns="0" rIns="0" bIns="0" rtlCol="0" anchor="ctr">
-            <a:normAutofit/>
+            <a:normAutofit fontScale="92500"/>
           </a:bodyPr>
           <a:lstStyle/>
           <a:p>
@@ -2816,7 +2924,7 @@
         </p:spPr>
         <p:txBody>
           <a:bodyPr wrap="square" lIns="0" tIns="0" rIns="0" bIns="0" rtlCol="0" anchor="ctr">
-            <a:normAutofit/>
+            <a:normAutofit lnSpcReduction="10000"/>
           </a:bodyPr>
           <a:lstStyle/>
           <a:p>
@@ -3139,15 +3247,7 @@
 
 <file path=ppt/slides/slide5.xml><?xml version="1.0" encoding="utf-8"?>
 <p:sld xmlns:a="http://schemas.openxmlformats.org/drawingml/2006/main" xmlns:r="http://schemas.openxmlformats.org/officeDocument/2006/relationships" xmlns:p="http://schemas.openxmlformats.org/presentationml/2006/main">
-  <p:cSld name="Slide 11">
-    <p:bg>
-      <p:bgPr>
-        <a:solidFill>
-          <a:srgbClr val="F2F3F0"/>
-        </a:solidFill>
-        <a:effectLst/>
-      </p:bgPr>
-    </p:bg>
+  <p:cSld>
     <p:spTree>
       <p:nvGrpSpPr>
         <p:cNvPr id="1" name=""/>
@@ -3164,791 +3264,2998 @@
       </p:grpSpPr>
       <p:sp>
         <p:nvSpPr>
-          <p:cNvPr id="2" name="Shape 0"/>
-          <p:cNvSpPr/>
-          <p:nvPr/>
-        </p:nvSpPr>
-        <p:spPr>
-          <a:xfrm>
-            <a:off x="603504" y="384048"/>
-            <a:ext cx="109728" cy="301752"/>
-          </a:xfrm>
-          <a:prstGeom prst="roundRect">
-            <a:avLst>
-              <a:gd name="adj" fmla="val 50000"/>
-            </a:avLst>
+          <p:cNvPr id="2" name="Rectangle 1"/>
+          <p:cNvSpPr/>
+          <p:nvPr/>
+        </p:nvSpPr>
+        <p:spPr>
+          <a:xfrm>
+            <a:off x="0" y="0"/>
+            <a:ext cx="12191695" cy="6858000"/>
+          </a:xfrm>
+          <a:prstGeom prst="rect">
+            <a:avLst/>
+          </a:prstGeom>
+          <a:solidFill>
+            <a:srgbClr val="F2F3F0"/>
+          </a:solidFill>
+          <a:ln>
+            <a:noFill/>
+          </a:ln>
+        </p:spPr>
+        <p:style>
+          <a:lnRef idx="1">
+            <a:schemeClr val="accent1"/>
+          </a:lnRef>
+          <a:fillRef idx="3">
+            <a:schemeClr val="accent1"/>
+          </a:fillRef>
+          <a:effectRef idx="2">
+            <a:schemeClr val="accent1"/>
+          </a:effectRef>
+          <a:fontRef idx="minor">
+            <a:schemeClr val="lt1"/>
+          </a:fontRef>
+        </p:style>
+        <p:txBody>
+          <a:bodyPr rtlCol="0" anchor="ctr"/>
+          <a:lstStyle/>
+          <a:p>
+            <a:pPr algn="ctr"/>
+            <a:endParaRPr/>
+          </a:p>
+        </p:txBody>
+      </p:sp>
+      <p:sp>
+        <p:nvSpPr>
+          <p:cNvPr id="3" name="Rectangle 2"/>
+          <p:cNvSpPr/>
+          <p:nvPr/>
+        </p:nvSpPr>
+        <p:spPr>
+          <a:xfrm>
+            <a:off x="0" y="0"/>
+            <a:ext cx="12191695" cy="77724"/>
+          </a:xfrm>
+          <a:prstGeom prst="rect">
+            <a:avLst/>
           </a:prstGeom>
           <a:solidFill>
             <a:srgbClr val="127A4B"/>
           </a:solidFill>
-          <a:ln w="12700">
+          <a:ln>
+            <a:noFill/>
+          </a:ln>
+        </p:spPr>
+        <p:style>
+          <a:lnRef idx="1">
+            <a:schemeClr val="accent1"/>
+          </a:lnRef>
+          <a:fillRef idx="3">
+            <a:schemeClr val="accent1"/>
+          </a:fillRef>
+          <a:effectRef idx="2">
+            <a:schemeClr val="accent1"/>
+          </a:effectRef>
+          <a:fontRef idx="minor">
+            <a:schemeClr val="lt1"/>
+          </a:fontRef>
+        </p:style>
+        <p:txBody>
+          <a:bodyPr rtlCol="0" anchor="ctr"/>
+          <a:lstStyle/>
+          <a:p>
+            <a:pPr algn="ctr"/>
+            <a:endParaRPr/>
+          </a:p>
+        </p:txBody>
+      </p:sp>
+      <p:cxnSp>
+        <p:nvCxnSpPr>
+          <p:cNvPr id="4" name="Connector 3"/>
+          <p:cNvCxnSpPr/>
+          <p:nvPr/>
+        </p:nvCxnSpPr>
+        <p:spPr>
+          <a:xfrm>
+            <a:off x="557784" y="347472"/>
+            <a:ext cx="365760" cy="0"/>
+          </a:xfrm>
+          <a:prstGeom prst="line">
+            <a:avLst/>
+          </a:prstGeom>
+          <a:ln w="38100">
             <a:solidFill>
-              <a:srgbClr val="127A4B">
-                <a:alpha val="0"/>
-              </a:srgbClr>
+              <a:srgbClr val="0F1B2D"/>
             </a:solidFill>
-            <a:prstDash val="solid"/>
           </a:ln>
         </p:spPr>
-        <p:txBody>
-          <a:bodyPr/>
-          <a:lstStyle/>
-          <a:p>
-            <a:endParaRPr lang="en-US"/>
-          </a:p>
-        </p:txBody>
-      </p:sp>
-      <p:sp>
-        <p:nvSpPr>
-          <p:cNvPr id="3" name="Text 1"/>
-          <p:cNvSpPr/>
-          <p:nvPr/>
-        </p:nvSpPr>
-        <p:spPr>
-          <a:xfrm>
-            <a:off x="850392" y="393192"/>
-            <a:ext cx="10424160" cy="228600"/>
-          </a:xfrm>
-          <a:prstGeom prst="rect">
-            <a:avLst/>
-          </a:prstGeom>
-          <a:noFill/>
-          <a:ln/>
-        </p:spPr>
-        <p:txBody>
-          <a:bodyPr wrap="square" lIns="0" tIns="0" rIns="0" bIns="0" rtlCol="0" anchor="ctr">
-            <a:normAutofit/>
+        <p:style>
+          <a:lnRef idx="2">
+            <a:schemeClr val="accent1"/>
+          </a:lnRef>
+          <a:fillRef idx="0">
+            <a:schemeClr val="accent1"/>
+          </a:fillRef>
+          <a:effectRef idx="1">
+            <a:schemeClr val="accent1"/>
+          </a:effectRef>
+          <a:fontRef idx="minor">
+            <a:schemeClr val="tx1"/>
+          </a:fontRef>
+        </p:style>
+      </p:cxnSp>
+      <p:sp>
+        <p:nvSpPr>
+          <p:cNvPr id="5" name="Oval 4"/>
+          <p:cNvSpPr/>
+          <p:nvPr/>
+        </p:nvSpPr>
+        <p:spPr>
+          <a:xfrm>
+            <a:off x="523951" y="277063"/>
+            <a:ext cx="140817" cy="140817"/>
+          </a:xfrm>
+          <a:prstGeom prst="ellipse">
+            <a:avLst/>
+          </a:prstGeom>
+          <a:solidFill>
+            <a:srgbClr val="F2F3F0"/>
+          </a:solidFill>
+          <a:ln w="29209">
+            <a:solidFill>
+              <a:srgbClr val="0F1B2D"/>
+            </a:solidFill>
+          </a:ln>
+        </p:spPr>
+        <p:style>
+          <a:lnRef idx="1">
+            <a:schemeClr val="accent1"/>
+          </a:lnRef>
+          <a:fillRef idx="3">
+            <a:schemeClr val="accent1"/>
+          </a:fillRef>
+          <a:effectRef idx="2">
+            <a:schemeClr val="accent1"/>
+          </a:effectRef>
+          <a:fontRef idx="minor">
+            <a:schemeClr val="lt1"/>
+          </a:fontRef>
+        </p:style>
+        <p:txBody>
+          <a:bodyPr rtlCol="0" anchor="ctr"/>
+          <a:lstStyle/>
+          <a:p>
+            <a:pPr algn="ctr"/>
+            <a:endParaRPr/>
+          </a:p>
+        </p:txBody>
+      </p:sp>
+      <p:sp>
+        <p:nvSpPr>
+          <p:cNvPr id="6" name="Oval 5"/>
+          <p:cNvSpPr/>
+          <p:nvPr/>
+        </p:nvSpPr>
+        <p:spPr>
+          <a:xfrm>
+            <a:off x="816559" y="277063"/>
+            <a:ext cx="140817" cy="140817"/>
+          </a:xfrm>
+          <a:prstGeom prst="ellipse">
+            <a:avLst/>
+          </a:prstGeom>
+          <a:solidFill>
+            <a:srgbClr val="F2F3F0"/>
+          </a:solidFill>
+          <a:ln w="29209">
+            <a:solidFill>
+              <a:srgbClr val="0F1B2D"/>
+            </a:solidFill>
+          </a:ln>
+        </p:spPr>
+        <p:style>
+          <a:lnRef idx="1">
+            <a:schemeClr val="accent1"/>
+          </a:lnRef>
+          <a:fillRef idx="3">
+            <a:schemeClr val="accent1"/>
+          </a:fillRef>
+          <a:effectRef idx="2">
+            <a:schemeClr val="accent1"/>
+          </a:effectRef>
+          <a:fontRef idx="minor">
+            <a:schemeClr val="lt1"/>
+          </a:fontRef>
+        </p:style>
+        <p:txBody>
+          <a:bodyPr rtlCol="0" anchor="ctr"/>
+          <a:lstStyle/>
+          <a:p>
+            <a:pPr algn="ctr"/>
+            <a:endParaRPr/>
+          </a:p>
+        </p:txBody>
+      </p:sp>
+      <p:sp>
+        <p:nvSpPr>
+          <p:cNvPr id="7" name="TextBox 6"/>
+          <p:cNvSpPr txBox="1"/>
+          <p:nvPr/>
+        </p:nvSpPr>
+        <p:spPr>
+          <a:xfrm>
+            <a:off x="1051560" y="214884"/>
+            <a:ext cx="2194560" cy="292608"/>
+          </a:xfrm>
+          <a:prstGeom prst="rect">
+            <a:avLst/>
+          </a:prstGeom>
+          <a:noFill/>
+        </p:spPr>
+        <p:txBody>
+          <a:bodyPr wrap="square" lIns="0" tIns="0" rIns="0" bIns="0" anchor="t">
+            <a:spAutoFit/>
           </a:bodyPr>
           <a:lstStyle/>
           <a:p>
-            <a:pPr marL="0" indent="0" algn="l">
-              <a:buNone/>
-            </a:pPr>
+            <a:pPr algn="l"/>
             <a:r>
-              <a:rPr lang="en-US" sz="1040" b="1" kern="0" spc="140" dirty="0">
-                <a:solidFill>
-                  <a:srgbClr val="6B7686"/>
-                </a:solidFill>
-                <a:latin typeface="Atkinson Hyperlegible Next" pitchFamily="34" charset="0"/>
-                <a:ea typeface="Atkinson Hyperlegible Next" pitchFamily="34" charset="-122"/>
-                <a:cs typeface="Atkinson Hyperlegible Next" pitchFamily="34" charset="-120"/>
-              </a:rPr>
-              <a:t>PRODUCT MATURITY</a:t>
-            </a:r>
-            <a:endParaRPr lang="en-US" sz="1040" dirty="0"/>
-          </a:p>
-        </p:txBody>
-      </p:sp>
-      <p:sp>
-        <p:nvSpPr>
-          <p:cNvPr id="4" name="Text 2"/>
-          <p:cNvSpPr/>
-          <p:nvPr/>
-        </p:nvSpPr>
-        <p:spPr>
-          <a:xfrm>
-            <a:off x="621792" y="868680"/>
-            <a:ext cx="10972800" cy="914400"/>
-          </a:xfrm>
-          <a:prstGeom prst="rect">
-            <a:avLst/>
-          </a:prstGeom>
-          <a:noFill/>
-          <a:ln/>
-        </p:spPr>
-        <p:txBody>
-          <a:bodyPr wrap="square" lIns="0" tIns="0" rIns="0" bIns="0" rtlCol="0" anchor="ctr">
-            <a:normAutofit/>
-          </a:bodyPr>
-          <a:lstStyle/>
-          <a:p>
-            <a:pPr marL="0" indent="0" algn="l">
-              <a:buNone/>
-            </a:pPr>
-            <a:r>
-              <a:rPr lang="en-US" sz="3300" b="1" dirty="0">
+              <a:rPr sz="1400" b="1">
                 <a:solidFill>
                   <a:srgbClr val="0F1B2D"/>
                 </a:solidFill>
-                <a:latin typeface="Atkinson Hyperlegible Next" pitchFamily="34" charset="0"/>
-                <a:ea typeface="Atkinson Hyperlegible Next" pitchFamily="34" charset="-122"/>
-                <a:cs typeface="Atkinson Hyperlegible Next" pitchFamily="34" charset="-120"/>
+                <a:latin typeface="Noto Sans"/>
               </a:rPr>
-              <a:t>Working MVP now. Bank-grade path next.</a:t>
+              <a:t>ROOTED</a:t>
             </a:r>
-            <a:endParaRPr lang="en-US" sz="3300" dirty="0"/>
-          </a:p>
-        </p:txBody>
-      </p:sp>
-      <p:sp>
-        <p:nvSpPr>
-          <p:cNvPr id="5" name="Text 3"/>
-          <p:cNvSpPr/>
-          <p:nvPr/>
-        </p:nvSpPr>
-        <p:spPr>
-          <a:xfrm>
-            <a:off x="630936" y="1719072"/>
-            <a:ext cx="10881360" cy="548640"/>
-          </a:xfrm>
-          <a:prstGeom prst="rect">
-            <a:avLst/>
-          </a:prstGeom>
-          <a:noFill/>
-          <a:ln/>
-        </p:spPr>
-        <p:txBody>
-          <a:bodyPr wrap="square" lIns="0" tIns="0" rIns="0" bIns="0" rtlCol="0" anchor="ctr">
-            <a:normAutofit/>
+          </a:p>
+        </p:txBody>
+      </p:sp>
+      <p:sp>
+        <p:nvSpPr>
+          <p:cNvPr id="8" name="TextBox 7"/>
+          <p:cNvSpPr txBox="1"/>
+          <p:nvPr/>
+        </p:nvSpPr>
+        <p:spPr>
+          <a:xfrm>
+            <a:off x="7223760" y="233172"/>
+            <a:ext cx="4343400" cy="237744"/>
+          </a:xfrm>
+          <a:prstGeom prst="rect">
+            <a:avLst/>
+          </a:prstGeom>
+          <a:noFill/>
+        </p:spPr>
+        <p:txBody>
+          <a:bodyPr wrap="square" lIns="0" tIns="0" rIns="0" bIns="0" anchor="t">
+            <a:spAutoFit/>
           </a:bodyPr>
           <a:lstStyle/>
           <a:p>
-            <a:pPr marL="0" indent="0" algn="l">
-              <a:buNone/>
-            </a:pPr>
+            <a:pPr algn="r"/>
             <a:r>
-              <a:rPr lang="en-US" sz="1550" dirty="0">
+              <a:rPr sz="1019" b="1">
+                <a:solidFill>
+                  <a:srgbClr val="5A6474"/>
+                </a:solidFill>
+                <a:latin typeface="Noto Sans"/>
+              </a:rPr>
+              <a:t>ENTERPRISE SCALABILITY · PROPOSED</a:t>
+            </a:r>
+          </a:p>
+        </p:txBody>
+      </p:sp>
+      <p:sp>
+        <p:nvSpPr>
+          <p:cNvPr id="9" name="TextBox 8"/>
+          <p:cNvSpPr txBox="1"/>
+          <p:nvPr/>
+        </p:nvSpPr>
+        <p:spPr>
+          <a:xfrm>
+            <a:off x="566928" y="704088"/>
+            <a:ext cx="11064240" cy="502920"/>
+          </a:xfrm>
+          <a:prstGeom prst="rect">
+            <a:avLst/>
+          </a:prstGeom>
+          <a:noFill/>
+        </p:spPr>
+        <p:txBody>
+          <a:bodyPr wrap="square" lIns="0" tIns="0" rIns="0" bIns="0" anchor="t">
+            <a:spAutoFit/>
+          </a:bodyPr>
+          <a:lstStyle/>
+          <a:p>
+            <a:pPr algn="l"/>
+            <a:r>
+              <a:rPr sz="3050" b="1">
+                <a:solidFill>
+                  <a:srgbClr val="0F1B2D"/>
+                </a:solidFill>
+                <a:latin typeface="Noto Sans"/>
+              </a:rPr>
+              <a:t>Scale content once. Serve learners everywhere.</a:t>
+            </a:r>
+          </a:p>
+        </p:txBody>
+      </p:sp>
+      <p:sp>
+        <p:nvSpPr>
+          <p:cNvPr id="10" name="TextBox 9"/>
+          <p:cNvSpPr txBox="1"/>
+          <p:nvPr/>
+        </p:nvSpPr>
+        <p:spPr>
+          <a:xfrm>
+            <a:off x="576072" y="1280160"/>
+            <a:ext cx="10881360" cy="320040"/>
+          </a:xfrm>
+          <a:prstGeom prst="rect">
+            <a:avLst/>
+          </a:prstGeom>
+          <a:noFill/>
+        </p:spPr>
+        <p:txBody>
+          <a:bodyPr wrap="square" lIns="0" tIns="0" rIns="0" bIns="0" anchor="t">
+            <a:spAutoFit/>
+          </a:bodyPr>
+          <a:lstStyle/>
+          <a:p>
+            <a:pPr algn="l"/>
+            <a:r>
+              <a:rPr sz="1410" b="0">
                 <a:solidFill>
                   <a:srgbClr val="3B4656"/>
                 </a:solidFill>
-                <a:latin typeface="Atkinson Hyperlegible Next" pitchFamily="34" charset="0"/>
-                <a:ea typeface="Atkinson Hyperlegible Next" pitchFamily="34" charset="-122"/>
-                <a:cs typeface="Atkinson Hyperlegible Next" pitchFamily="34" charset="-120"/>
+                <a:latin typeface="Noto Sans"/>
               </a:rPr>
-              <a:t>Future infrastructure is presented as a roadmap—not as deployed capability.</a:t>
+              <a:t>A realistic path from hackathon MVP to a secure, resilient, high-traffic learning platform.</a:t>
             </a:r>
-            <a:endParaRPr lang="en-US" sz="1550" dirty="0"/>
-          </a:p>
-        </p:txBody>
-      </p:sp>
-      <p:sp>
-        <p:nvSpPr>
-          <p:cNvPr id="6" name="Shape 4"/>
-          <p:cNvSpPr/>
-          <p:nvPr/>
-        </p:nvSpPr>
-        <p:spPr>
-          <a:xfrm>
-            <a:off x="594360" y="6510528"/>
-            <a:ext cx="10981944" cy="0"/>
+          </a:p>
+        </p:txBody>
+      </p:sp>
+      <p:sp>
+        <p:nvSpPr>
+          <p:cNvPr id="11" name="TextBox 10"/>
+          <p:cNvSpPr txBox="1"/>
+          <p:nvPr/>
+        </p:nvSpPr>
+        <p:spPr>
+          <a:xfrm>
+            <a:off x="585216" y="1801368"/>
+            <a:ext cx="4297680" cy="246888"/>
+          </a:xfrm>
+          <a:prstGeom prst="rect">
+            <a:avLst/>
+          </a:prstGeom>
+          <a:noFill/>
+        </p:spPr>
+        <p:txBody>
+          <a:bodyPr wrap="square" lIns="0" tIns="0" rIns="0" bIns="0" anchor="t">
+            <a:spAutoFit/>
+          </a:bodyPr>
+          <a:lstStyle/>
+          <a:p>
+            <a:pPr algn="l"/>
+            <a:r>
+              <a:rPr sz="1110" b="1">
+                <a:solidFill>
+                  <a:srgbClr val="1F5FBF"/>
+                </a:solidFill>
+                <a:latin typeface="Noto Sans"/>
+              </a:rPr>
+              <a:t>01   LEARNER DELIVERY  /  CACHE FIRST</a:t>
+            </a:r>
+          </a:p>
+        </p:txBody>
+      </p:sp>
+      <p:cxnSp>
+        <p:nvCxnSpPr>
+          <p:cNvPr id="12" name="Connector 11"/>
+          <p:cNvCxnSpPr/>
+          <p:nvPr/>
+        </p:nvCxnSpPr>
+        <p:spPr>
+          <a:xfrm>
+            <a:off x="1691640" y="2185416"/>
+            <a:ext cx="8439912" cy="0"/>
           </a:xfrm>
           <a:prstGeom prst="line">
             <a:avLst/>
           </a:prstGeom>
-          <a:noFill/>
-          <a:ln w="7620">
+          <a:ln w="63500">
             <a:solidFill>
-              <a:srgbClr val="BEC5C3"/>
+              <a:srgbClr val="127A4B"/>
             </a:solidFill>
-            <a:prstDash val="solid"/>
           </a:ln>
         </p:spPr>
-        <p:txBody>
-          <a:bodyPr/>
-          <a:lstStyle/>
-          <a:p>
-            <a:endParaRPr lang="en-US"/>
-          </a:p>
-        </p:txBody>
-      </p:sp>
-      <p:sp>
-        <p:nvSpPr>
-          <p:cNvPr id="7" name="Text 5"/>
-          <p:cNvSpPr/>
-          <p:nvPr/>
-        </p:nvSpPr>
-        <p:spPr>
-          <a:xfrm>
-            <a:off x="594360" y="6556248"/>
-            <a:ext cx="8229600" cy="128016"/>
-          </a:xfrm>
-          <a:prstGeom prst="rect">
-            <a:avLst/>
-          </a:prstGeom>
-          <a:noFill/>
-          <a:ln/>
-        </p:spPr>
-        <p:txBody>
-          <a:bodyPr wrap="square" lIns="0" tIns="0" rIns="0" bIns="0" rtlCol="0" anchor="ctr">
-            <a:normAutofit/>
+        <p:style>
+          <a:lnRef idx="2">
+            <a:schemeClr val="accent1"/>
+          </a:lnRef>
+          <a:fillRef idx="0">
+            <a:schemeClr val="accent1"/>
+          </a:fillRef>
+          <a:effectRef idx="1">
+            <a:schemeClr val="accent1"/>
+          </a:effectRef>
+          <a:fontRef idx="minor">
+            <a:schemeClr val="tx1"/>
+          </a:fontRef>
+        </p:style>
+      </p:cxnSp>
+      <p:sp>
+        <p:nvSpPr>
+          <p:cNvPr id="13" name="Oval 12"/>
+          <p:cNvSpPr/>
+          <p:nvPr/>
+        </p:nvSpPr>
+        <p:spPr>
+          <a:xfrm>
+            <a:off x="1687068" y="2061972"/>
+            <a:ext cx="246888" cy="246888"/>
+          </a:xfrm>
+          <a:prstGeom prst="ellipse">
+            <a:avLst/>
+          </a:prstGeom>
+          <a:solidFill>
+            <a:srgbClr val="FFFFFF"/>
+          </a:solidFill>
+          <a:ln w="38100">
+            <a:solidFill>
+              <a:srgbClr val="127A4B"/>
+            </a:solidFill>
+          </a:ln>
+        </p:spPr>
+        <p:style>
+          <a:lnRef idx="1">
+            <a:schemeClr val="accent1"/>
+          </a:lnRef>
+          <a:fillRef idx="3">
+            <a:schemeClr val="accent1"/>
+          </a:fillRef>
+          <a:effectRef idx="2">
+            <a:schemeClr val="accent1"/>
+          </a:effectRef>
+          <a:fontRef idx="minor">
+            <a:schemeClr val="lt1"/>
+          </a:fontRef>
+        </p:style>
+        <p:txBody>
+          <a:bodyPr rtlCol="0" anchor="ctr"/>
+          <a:lstStyle/>
+          <a:p>
+            <a:pPr algn="ctr"/>
+            <a:endParaRPr/>
+          </a:p>
+        </p:txBody>
+      </p:sp>
+      <p:sp>
+        <p:nvSpPr>
+          <p:cNvPr id="14" name="TextBox 13"/>
+          <p:cNvSpPr txBox="1"/>
+          <p:nvPr/>
+        </p:nvSpPr>
+        <p:spPr>
+          <a:xfrm>
+            <a:off x="1709928" y="2076602"/>
+            <a:ext cx="201168" cy="201168"/>
+          </a:xfrm>
+          <a:prstGeom prst="rect">
+            <a:avLst/>
+          </a:prstGeom>
+          <a:noFill/>
+        </p:spPr>
+        <p:txBody>
+          <a:bodyPr wrap="square" lIns="0" tIns="0" rIns="0" bIns="0" anchor="t">
+            <a:spAutoFit/>
           </a:bodyPr>
           <a:lstStyle/>
           <a:p>
-            <a:pPr marL="0" indent="0" algn="l">
-              <a:buNone/>
-            </a:pPr>
+            <a:pPr algn="ctr"/>
             <a:r>
-              <a:rPr lang="en-US" sz="810" b="1" dirty="0">
+              <a:rPr sz="1030" b="1">
+                <a:solidFill>
+                  <a:srgbClr val="127A4B"/>
+                </a:solidFill>
+                <a:latin typeface="Noto Sans"/>
+              </a:rPr>
+              <a:t>1</a:t>
+            </a:r>
+          </a:p>
+        </p:txBody>
+      </p:sp>
+      <p:sp>
+        <p:nvSpPr>
+          <p:cNvPr id="15" name="Rounded Rectangle 14"/>
+          <p:cNvSpPr/>
+          <p:nvPr/>
+        </p:nvSpPr>
+        <p:spPr>
+          <a:xfrm>
+            <a:off x="585216" y="2377440"/>
+            <a:ext cx="2450592" cy="1883664"/>
+          </a:xfrm>
+          <a:prstGeom prst="roundRect">
+            <a:avLst>
+              <a:gd name="adj" fmla="val 5000"/>
+            </a:avLst>
+          </a:prstGeom>
+          <a:solidFill>
+            <a:srgbClr val="FFFFFF"/>
+          </a:solidFill>
+          <a:ln w="11430">
+            <a:solidFill>
+              <a:srgbClr val="CED4D0"/>
+            </a:solidFill>
+          </a:ln>
+        </p:spPr>
+        <p:style>
+          <a:lnRef idx="1">
+            <a:schemeClr val="accent1"/>
+          </a:lnRef>
+          <a:fillRef idx="3">
+            <a:schemeClr val="accent1"/>
+          </a:fillRef>
+          <a:effectRef idx="2">
+            <a:schemeClr val="accent1"/>
+          </a:effectRef>
+          <a:fontRef idx="minor">
+            <a:schemeClr val="lt1"/>
+          </a:fontRef>
+        </p:style>
+        <p:txBody>
+          <a:bodyPr rtlCol="0" anchor="ctr"/>
+          <a:lstStyle/>
+          <a:p>
+            <a:pPr algn="ctr"/>
+            <a:endParaRPr/>
+          </a:p>
+        </p:txBody>
+      </p:sp>
+      <p:sp>
+        <p:nvSpPr>
+          <p:cNvPr id="16" name="Rectangle 15"/>
+          <p:cNvSpPr/>
+          <p:nvPr/>
+        </p:nvSpPr>
+        <p:spPr>
+          <a:xfrm>
+            <a:off x="585216" y="2377440"/>
+            <a:ext cx="2450592" cy="60350"/>
+          </a:xfrm>
+          <a:prstGeom prst="rect">
+            <a:avLst/>
+          </a:prstGeom>
+          <a:solidFill>
+            <a:srgbClr val="127A4B"/>
+          </a:solidFill>
+          <a:ln>
+            <a:noFill/>
+          </a:ln>
+        </p:spPr>
+        <p:style>
+          <a:lnRef idx="1">
+            <a:schemeClr val="accent1"/>
+          </a:lnRef>
+          <a:fillRef idx="3">
+            <a:schemeClr val="accent1"/>
+          </a:fillRef>
+          <a:effectRef idx="2">
+            <a:schemeClr val="accent1"/>
+          </a:effectRef>
+          <a:fontRef idx="minor">
+            <a:schemeClr val="lt1"/>
+          </a:fontRef>
+        </p:style>
+        <p:txBody>
+          <a:bodyPr rtlCol="0" anchor="ctr"/>
+          <a:lstStyle/>
+          <a:p>
+            <a:pPr algn="ctr"/>
+            <a:endParaRPr/>
+          </a:p>
+        </p:txBody>
+      </p:sp>
+      <p:sp>
+        <p:nvSpPr>
+          <p:cNvPr id="17" name="TextBox 16"/>
+          <p:cNvSpPr txBox="1"/>
+          <p:nvPr/>
+        </p:nvSpPr>
+        <p:spPr>
+          <a:xfrm>
+            <a:off x="749808" y="2542032"/>
+            <a:ext cx="2121408" cy="246888"/>
+          </a:xfrm>
+          <a:prstGeom prst="rect">
+            <a:avLst/>
+          </a:prstGeom>
+          <a:noFill/>
+        </p:spPr>
+        <p:txBody>
+          <a:bodyPr wrap="square" lIns="0" tIns="0" rIns="0" bIns="0" anchor="t">
+            <a:spAutoFit/>
+          </a:bodyPr>
+          <a:lstStyle/>
+          <a:p>
+            <a:pPr algn="l"/>
+            <a:r>
+              <a:rPr sz="1010" b="1">
+                <a:solidFill>
+                  <a:srgbClr val="127A4B"/>
+                </a:solidFill>
+                <a:latin typeface="Noto Sans"/>
+              </a:rPr>
+              <a:t>BROWSER</a:t>
+            </a:r>
+          </a:p>
+        </p:txBody>
+      </p:sp>
+      <p:sp>
+        <p:nvSpPr>
+          <p:cNvPr id="18" name="TextBox 17"/>
+          <p:cNvSpPr txBox="1"/>
+          <p:nvPr/>
+        </p:nvSpPr>
+        <p:spPr>
+          <a:xfrm>
+            <a:off x="749808" y="2834640"/>
+            <a:ext cx="2139696" cy="658368"/>
+          </a:xfrm>
+          <a:prstGeom prst="rect">
+            <a:avLst/>
+          </a:prstGeom>
+          <a:noFill/>
+        </p:spPr>
+        <p:txBody>
+          <a:bodyPr wrap="square" lIns="0" tIns="0" rIns="0" bIns="0" anchor="t">
+            <a:spAutoFit/>
+          </a:bodyPr>
+          <a:lstStyle/>
+          <a:p>
+            <a:pPr algn="l"/>
+            <a:r>
+              <a:rPr sz="1570" b="1">
+                <a:solidFill>
+                  <a:srgbClr val="0F1B2D"/>
+                </a:solidFill>
+                <a:latin typeface="Noto Sans"/>
+              </a:rPr>
+              <a:t>Browser-first learning</a:t>
+            </a:r>
+          </a:p>
+        </p:txBody>
+      </p:sp>
+      <p:sp>
+        <p:nvSpPr>
+          <p:cNvPr id="19" name="TextBox 18"/>
+          <p:cNvSpPr txBox="1"/>
+          <p:nvPr/>
+        </p:nvSpPr>
+        <p:spPr>
+          <a:xfrm>
+            <a:off x="749808" y="3465576"/>
+            <a:ext cx="2139696" cy="393192"/>
+          </a:xfrm>
+          <a:prstGeom prst="rect">
+            <a:avLst/>
+          </a:prstGeom>
+          <a:noFill/>
+        </p:spPr>
+        <p:txBody>
+          <a:bodyPr wrap="square" lIns="0" tIns="0" rIns="0" bIns="0" anchor="t">
+            <a:spAutoFit/>
+          </a:bodyPr>
+          <a:lstStyle/>
+          <a:p>
+            <a:pPr algn="l"/>
+            <a:r>
+              <a:rPr sz="1150" b="0">
+                <a:solidFill>
+                  <a:srgbClr val="3B4656"/>
+                </a:solidFill>
+                <a:latin typeface="Noto Sans"/>
+              </a:rPr>
+              <a:t>Game, budget and progress
+stay on the device.</a:t>
+            </a:r>
+          </a:p>
+        </p:txBody>
+      </p:sp>
+      <p:sp>
+        <p:nvSpPr>
+          <p:cNvPr id="20" name="Rounded Rectangle 19"/>
+          <p:cNvSpPr/>
+          <p:nvPr/>
+        </p:nvSpPr>
+        <p:spPr>
+          <a:xfrm>
+            <a:off x="740664" y="3977639"/>
+            <a:ext cx="2139696" cy="210312"/>
+          </a:xfrm>
+          <a:prstGeom prst="roundRect">
+            <a:avLst>
+              <a:gd name="adj" fmla="val 9000"/>
+            </a:avLst>
+          </a:prstGeom>
+          <a:solidFill>
+            <a:srgbClr val="D6EBDF"/>
+          </a:solidFill>
+          <a:ln>
+            <a:noFill/>
+          </a:ln>
+        </p:spPr>
+        <p:style>
+          <a:lnRef idx="1">
+            <a:schemeClr val="accent1"/>
+          </a:lnRef>
+          <a:fillRef idx="3">
+            <a:schemeClr val="accent1"/>
+          </a:fillRef>
+          <a:effectRef idx="2">
+            <a:schemeClr val="accent1"/>
+          </a:effectRef>
+          <a:fontRef idx="minor">
+            <a:schemeClr val="lt1"/>
+          </a:fontRef>
+        </p:style>
+        <p:txBody>
+          <a:bodyPr rtlCol="0" anchor="ctr"/>
+          <a:lstStyle/>
+          <a:p>
+            <a:pPr algn="ctr"/>
+            <a:endParaRPr/>
+          </a:p>
+        </p:txBody>
+      </p:sp>
+      <p:sp>
+        <p:nvSpPr>
+          <p:cNvPr id="21" name="TextBox 20"/>
+          <p:cNvSpPr txBox="1"/>
+          <p:nvPr/>
+        </p:nvSpPr>
+        <p:spPr>
+          <a:xfrm>
+            <a:off x="813816" y="4006900"/>
+            <a:ext cx="1993392" cy="128016"/>
+          </a:xfrm>
+          <a:prstGeom prst="rect">
+            <a:avLst/>
+          </a:prstGeom>
+          <a:noFill/>
+        </p:spPr>
+        <p:txBody>
+          <a:bodyPr wrap="square" lIns="0" tIns="0" rIns="0" bIns="0" anchor="t">
+            <a:spAutoFit/>
+          </a:bodyPr>
+          <a:lstStyle/>
+          <a:p>
+            <a:pPr algn="l"/>
+            <a:r>
+              <a:rPr sz="910" b="1">
+                <a:solidFill>
+                  <a:srgbClr val="127A4B"/>
+                </a:solidFill>
+                <a:latin typeface="Noto Sans"/>
+              </a:rPr>
+              <a:t>No game server needed</a:t>
+            </a:r>
+          </a:p>
+        </p:txBody>
+      </p:sp>
+      <p:sp>
+        <p:nvSpPr>
+          <p:cNvPr id="22" name="Oval 21"/>
+          <p:cNvSpPr/>
+          <p:nvPr/>
+        </p:nvSpPr>
+        <p:spPr>
+          <a:xfrm>
+            <a:off x="4393692" y="2061972"/>
+            <a:ext cx="246888" cy="246888"/>
+          </a:xfrm>
+          <a:prstGeom prst="ellipse">
+            <a:avLst/>
+          </a:prstGeom>
+          <a:solidFill>
+            <a:srgbClr val="FFFFFF"/>
+          </a:solidFill>
+          <a:ln w="38100">
+            <a:solidFill>
+              <a:srgbClr val="127A4B"/>
+            </a:solidFill>
+          </a:ln>
+        </p:spPr>
+        <p:style>
+          <a:lnRef idx="1">
+            <a:schemeClr val="accent1"/>
+          </a:lnRef>
+          <a:fillRef idx="3">
+            <a:schemeClr val="accent1"/>
+          </a:fillRef>
+          <a:effectRef idx="2">
+            <a:schemeClr val="accent1"/>
+          </a:effectRef>
+          <a:fontRef idx="minor">
+            <a:schemeClr val="lt1"/>
+          </a:fontRef>
+        </p:style>
+        <p:txBody>
+          <a:bodyPr rtlCol="0" anchor="ctr"/>
+          <a:lstStyle/>
+          <a:p>
+            <a:pPr algn="ctr"/>
+            <a:endParaRPr/>
+          </a:p>
+        </p:txBody>
+      </p:sp>
+      <p:sp>
+        <p:nvSpPr>
+          <p:cNvPr id="23" name="TextBox 22"/>
+          <p:cNvSpPr txBox="1"/>
+          <p:nvPr/>
+        </p:nvSpPr>
+        <p:spPr>
+          <a:xfrm>
+            <a:off x="4416552" y="2076602"/>
+            <a:ext cx="201168" cy="201168"/>
+          </a:xfrm>
+          <a:prstGeom prst="rect">
+            <a:avLst/>
+          </a:prstGeom>
+          <a:noFill/>
+        </p:spPr>
+        <p:txBody>
+          <a:bodyPr wrap="square" lIns="0" tIns="0" rIns="0" bIns="0" anchor="t">
+            <a:spAutoFit/>
+          </a:bodyPr>
+          <a:lstStyle/>
+          <a:p>
+            <a:pPr algn="ctr"/>
+            <a:r>
+              <a:rPr sz="1030" b="1">
+                <a:solidFill>
+                  <a:srgbClr val="127A4B"/>
+                </a:solidFill>
+                <a:latin typeface="Noto Sans"/>
+              </a:rPr>
+              <a:t>2</a:t>
+            </a:r>
+          </a:p>
+        </p:txBody>
+      </p:sp>
+      <p:sp>
+        <p:nvSpPr>
+          <p:cNvPr id="24" name="Rounded Rectangle 23"/>
+          <p:cNvSpPr/>
+          <p:nvPr/>
+        </p:nvSpPr>
+        <p:spPr>
+          <a:xfrm>
+            <a:off x="3291840" y="2377440"/>
+            <a:ext cx="2450592" cy="1883664"/>
+          </a:xfrm>
+          <a:prstGeom prst="roundRect">
+            <a:avLst>
+              <a:gd name="adj" fmla="val 5000"/>
+            </a:avLst>
+          </a:prstGeom>
+          <a:solidFill>
+            <a:srgbClr val="FFFFFF"/>
+          </a:solidFill>
+          <a:ln w="11430">
+            <a:solidFill>
+              <a:srgbClr val="CED4D0"/>
+            </a:solidFill>
+          </a:ln>
+        </p:spPr>
+        <p:style>
+          <a:lnRef idx="1">
+            <a:schemeClr val="accent1"/>
+          </a:lnRef>
+          <a:fillRef idx="3">
+            <a:schemeClr val="accent1"/>
+          </a:fillRef>
+          <a:effectRef idx="2">
+            <a:schemeClr val="accent1"/>
+          </a:effectRef>
+          <a:fontRef idx="minor">
+            <a:schemeClr val="lt1"/>
+          </a:fontRef>
+        </p:style>
+        <p:txBody>
+          <a:bodyPr rtlCol="0" anchor="ctr"/>
+          <a:lstStyle/>
+          <a:p>
+            <a:pPr algn="ctr"/>
+            <a:endParaRPr/>
+          </a:p>
+        </p:txBody>
+      </p:sp>
+      <p:sp>
+        <p:nvSpPr>
+          <p:cNvPr id="25" name="Rectangle 24"/>
+          <p:cNvSpPr/>
+          <p:nvPr/>
+        </p:nvSpPr>
+        <p:spPr>
+          <a:xfrm>
+            <a:off x="3291840" y="2377440"/>
+            <a:ext cx="2450592" cy="60350"/>
+          </a:xfrm>
+          <a:prstGeom prst="rect">
+            <a:avLst/>
+          </a:prstGeom>
+          <a:solidFill>
+            <a:srgbClr val="1F5FBF"/>
+          </a:solidFill>
+          <a:ln>
+            <a:noFill/>
+          </a:ln>
+        </p:spPr>
+        <p:style>
+          <a:lnRef idx="1">
+            <a:schemeClr val="accent1"/>
+          </a:lnRef>
+          <a:fillRef idx="3">
+            <a:schemeClr val="accent1"/>
+          </a:fillRef>
+          <a:effectRef idx="2">
+            <a:schemeClr val="accent1"/>
+          </a:effectRef>
+          <a:fontRef idx="minor">
+            <a:schemeClr val="lt1"/>
+          </a:fontRef>
+        </p:style>
+        <p:txBody>
+          <a:bodyPr rtlCol="0" anchor="ctr"/>
+          <a:lstStyle/>
+          <a:p>
+            <a:pPr algn="ctr"/>
+            <a:endParaRPr/>
+          </a:p>
+        </p:txBody>
+      </p:sp>
+      <p:sp>
+        <p:nvSpPr>
+          <p:cNvPr id="26" name="TextBox 25"/>
+          <p:cNvSpPr txBox="1"/>
+          <p:nvPr/>
+        </p:nvSpPr>
+        <p:spPr>
+          <a:xfrm>
+            <a:off x="3456432" y="2542032"/>
+            <a:ext cx="2121408" cy="246888"/>
+          </a:xfrm>
+          <a:prstGeom prst="rect">
+            <a:avLst/>
+          </a:prstGeom>
+          <a:noFill/>
+        </p:spPr>
+        <p:txBody>
+          <a:bodyPr wrap="square" lIns="0" tIns="0" rIns="0" bIns="0" anchor="t">
+            <a:spAutoFit/>
+          </a:bodyPr>
+          <a:lstStyle/>
+          <a:p>
+            <a:pPr algn="l"/>
+            <a:r>
+              <a:rPr sz="1010" b="1">
+                <a:solidFill>
+                  <a:srgbClr val="1F5FBF"/>
+                </a:solidFill>
+                <a:latin typeface="Noto Sans"/>
+              </a:rPr>
+              <a:t>EDGE</a:t>
+            </a:r>
+          </a:p>
+        </p:txBody>
+      </p:sp>
+      <p:sp>
+        <p:nvSpPr>
+          <p:cNvPr id="27" name="TextBox 26"/>
+          <p:cNvSpPr txBox="1"/>
+          <p:nvPr/>
+        </p:nvSpPr>
+        <p:spPr>
+          <a:xfrm>
+            <a:off x="3456432" y="2834640"/>
+            <a:ext cx="2139696" cy="658368"/>
+          </a:xfrm>
+          <a:prstGeom prst="rect">
+            <a:avLst/>
+          </a:prstGeom>
+          <a:noFill/>
+        </p:spPr>
+        <p:txBody>
+          <a:bodyPr wrap="square" lIns="0" tIns="0" rIns="0" bIns="0" anchor="t">
+            <a:spAutoFit/>
+          </a:bodyPr>
+          <a:lstStyle/>
+          <a:p>
+            <a:pPr algn="l"/>
+            <a:r>
+              <a:rPr sz="1570" b="1">
+                <a:solidFill>
+                  <a:srgbClr val="0F1B2D"/>
+                </a:solidFill>
+                <a:latin typeface="Noto Sans"/>
+              </a:rPr>
+              <a:t>CDN + Cloud Armor</a:t>
+            </a:r>
+          </a:p>
+        </p:txBody>
+      </p:sp>
+      <p:sp>
+        <p:nvSpPr>
+          <p:cNvPr id="28" name="TextBox 27"/>
+          <p:cNvSpPr txBox="1"/>
+          <p:nvPr/>
+        </p:nvSpPr>
+        <p:spPr>
+          <a:xfrm>
+            <a:off x="3456432" y="3465576"/>
+            <a:ext cx="2139696" cy="393192"/>
+          </a:xfrm>
+          <a:prstGeom prst="rect">
+            <a:avLst/>
+          </a:prstGeom>
+          <a:noFill/>
+        </p:spPr>
+        <p:txBody>
+          <a:bodyPr wrap="square" lIns="0" tIns="0" rIns="0" bIns="0" anchor="t">
+            <a:spAutoFit/>
+          </a:bodyPr>
+          <a:lstStyle/>
+          <a:p>
+            <a:pPr algn="l"/>
+            <a:r>
+              <a:rPr sz="1150" b="0">
+                <a:solidFill>
+                  <a:srgbClr val="3B4656"/>
+                </a:solidFill>
+                <a:latin typeface="Noto Sans"/>
+              </a:rPr>
+              <a:t>Cache approved lessons;
+rate-limit API requests.</a:t>
+            </a:r>
+          </a:p>
+        </p:txBody>
+      </p:sp>
+      <p:sp>
+        <p:nvSpPr>
+          <p:cNvPr id="29" name="Rounded Rectangle 28"/>
+          <p:cNvSpPr/>
+          <p:nvPr/>
+        </p:nvSpPr>
+        <p:spPr>
+          <a:xfrm>
+            <a:off x="3447288" y="3977639"/>
+            <a:ext cx="2139696" cy="210312"/>
+          </a:xfrm>
+          <a:prstGeom prst="roundRect">
+            <a:avLst>
+              <a:gd name="adj" fmla="val 9000"/>
+            </a:avLst>
+          </a:prstGeom>
+          <a:solidFill>
+            <a:srgbClr val="DBE6F6"/>
+          </a:solidFill>
+          <a:ln>
+            <a:noFill/>
+          </a:ln>
+        </p:spPr>
+        <p:style>
+          <a:lnRef idx="1">
+            <a:schemeClr val="accent1"/>
+          </a:lnRef>
+          <a:fillRef idx="3">
+            <a:schemeClr val="accent1"/>
+          </a:fillRef>
+          <a:effectRef idx="2">
+            <a:schemeClr val="accent1"/>
+          </a:effectRef>
+          <a:fontRef idx="minor">
+            <a:schemeClr val="lt1"/>
+          </a:fontRef>
+        </p:style>
+        <p:txBody>
+          <a:bodyPr rtlCol="0" anchor="ctr"/>
+          <a:lstStyle/>
+          <a:p>
+            <a:pPr algn="ctr"/>
+            <a:endParaRPr/>
+          </a:p>
+        </p:txBody>
+      </p:sp>
+      <p:sp>
+        <p:nvSpPr>
+          <p:cNvPr id="30" name="TextBox 29"/>
+          <p:cNvSpPr txBox="1"/>
+          <p:nvPr/>
+        </p:nvSpPr>
+        <p:spPr>
+          <a:xfrm>
+            <a:off x="3520440" y="4006900"/>
+            <a:ext cx="1993392" cy="128016"/>
+          </a:xfrm>
+          <a:prstGeom prst="rect">
+            <a:avLst/>
+          </a:prstGeom>
+          <a:noFill/>
+        </p:spPr>
+        <p:txBody>
+          <a:bodyPr wrap="square" lIns="0" tIns="0" rIns="0" bIns="0" anchor="t">
+            <a:spAutoFit/>
+          </a:bodyPr>
+          <a:lstStyle/>
+          <a:p>
+            <a:pPr algn="l"/>
+            <a:r>
+              <a:rPr sz="910" b="1">
+                <a:solidFill>
+                  <a:srgbClr val="1F5FBF"/>
+                </a:solidFill>
+                <a:latin typeface="Noto Sans"/>
+              </a:rPr>
+              <a:t>Cache absorbs most traffic</a:t>
+            </a:r>
+          </a:p>
+        </p:txBody>
+      </p:sp>
+      <p:sp>
+        <p:nvSpPr>
+          <p:cNvPr id="31" name="Oval 30"/>
+          <p:cNvSpPr/>
+          <p:nvPr/>
+        </p:nvSpPr>
+        <p:spPr>
+          <a:xfrm>
+            <a:off x="7100316" y="2061972"/>
+            <a:ext cx="246888" cy="246888"/>
+          </a:xfrm>
+          <a:prstGeom prst="ellipse">
+            <a:avLst/>
+          </a:prstGeom>
+          <a:solidFill>
+            <a:srgbClr val="FFFFFF"/>
+          </a:solidFill>
+          <a:ln w="38100">
+            <a:solidFill>
+              <a:srgbClr val="127A4B"/>
+            </a:solidFill>
+          </a:ln>
+        </p:spPr>
+        <p:style>
+          <a:lnRef idx="1">
+            <a:schemeClr val="accent1"/>
+          </a:lnRef>
+          <a:fillRef idx="3">
+            <a:schemeClr val="accent1"/>
+          </a:fillRef>
+          <a:effectRef idx="2">
+            <a:schemeClr val="accent1"/>
+          </a:effectRef>
+          <a:fontRef idx="minor">
+            <a:schemeClr val="lt1"/>
+          </a:fontRef>
+        </p:style>
+        <p:txBody>
+          <a:bodyPr rtlCol="0" anchor="ctr"/>
+          <a:lstStyle/>
+          <a:p>
+            <a:pPr algn="ctr"/>
+            <a:endParaRPr/>
+          </a:p>
+        </p:txBody>
+      </p:sp>
+      <p:sp>
+        <p:nvSpPr>
+          <p:cNvPr id="32" name="TextBox 31"/>
+          <p:cNvSpPr txBox="1"/>
+          <p:nvPr/>
+        </p:nvSpPr>
+        <p:spPr>
+          <a:xfrm>
+            <a:off x="7123175" y="2076602"/>
+            <a:ext cx="201168" cy="201168"/>
+          </a:xfrm>
+          <a:prstGeom prst="rect">
+            <a:avLst/>
+          </a:prstGeom>
+          <a:noFill/>
+        </p:spPr>
+        <p:txBody>
+          <a:bodyPr wrap="square" lIns="0" tIns="0" rIns="0" bIns="0" anchor="t">
+            <a:spAutoFit/>
+          </a:bodyPr>
+          <a:lstStyle/>
+          <a:p>
+            <a:pPr algn="ctr"/>
+            <a:r>
+              <a:rPr sz="1030" b="1">
+                <a:solidFill>
+                  <a:srgbClr val="127A4B"/>
+                </a:solidFill>
+                <a:latin typeface="Noto Sans"/>
+              </a:rPr>
+              <a:t>3</a:t>
+            </a:r>
+          </a:p>
+        </p:txBody>
+      </p:sp>
+      <p:sp>
+        <p:nvSpPr>
+          <p:cNvPr id="33" name="Rounded Rectangle 32"/>
+          <p:cNvSpPr/>
+          <p:nvPr/>
+        </p:nvSpPr>
+        <p:spPr>
+          <a:xfrm>
+            <a:off x="5998464" y="2377440"/>
+            <a:ext cx="2450592" cy="1883664"/>
+          </a:xfrm>
+          <a:prstGeom prst="roundRect">
+            <a:avLst>
+              <a:gd name="adj" fmla="val 5000"/>
+            </a:avLst>
+          </a:prstGeom>
+          <a:solidFill>
+            <a:srgbClr val="FFFFFF"/>
+          </a:solidFill>
+          <a:ln w="11430">
+            <a:solidFill>
+              <a:srgbClr val="CED4D0"/>
+            </a:solidFill>
+          </a:ln>
+        </p:spPr>
+        <p:style>
+          <a:lnRef idx="1">
+            <a:schemeClr val="accent1"/>
+          </a:lnRef>
+          <a:fillRef idx="3">
+            <a:schemeClr val="accent1"/>
+          </a:fillRef>
+          <a:effectRef idx="2">
+            <a:schemeClr val="accent1"/>
+          </a:effectRef>
+          <a:fontRef idx="minor">
+            <a:schemeClr val="lt1"/>
+          </a:fontRef>
+        </p:style>
+        <p:txBody>
+          <a:bodyPr rtlCol="0" anchor="ctr"/>
+          <a:lstStyle/>
+          <a:p>
+            <a:pPr algn="ctr"/>
+            <a:endParaRPr/>
+          </a:p>
+        </p:txBody>
+      </p:sp>
+      <p:sp>
+        <p:nvSpPr>
+          <p:cNvPr id="34" name="Rectangle 33"/>
+          <p:cNvSpPr/>
+          <p:nvPr/>
+        </p:nvSpPr>
+        <p:spPr>
+          <a:xfrm>
+            <a:off x="5998464" y="2377440"/>
+            <a:ext cx="2450592" cy="60350"/>
+          </a:xfrm>
+          <a:prstGeom prst="rect">
+            <a:avLst/>
+          </a:prstGeom>
+          <a:solidFill>
+            <a:srgbClr val="1F5FBF"/>
+          </a:solidFill>
+          <a:ln>
+            <a:noFill/>
+          </a:ln>
+        </p:spPr>
+        <p:style>
+          <a:lnRef idx="1">
+            <a:schemeClr val="accent1"/>
+          </a:lnRef>
+          <a:fillRef idx="3">
+            <a:schemeClr val="accent1"/>
+          </a:fillRef>
+          <a:effectRef idx="2">
+            <a:schemeClr val="accent1"/>
+          </a:effectRef>
+          <a:fontRef idx="minor">
+            <a:schemeClr val="lt1"/>
+          </a:fontRef>
+        </p:style>
+        <p:txBody>
+          <a:bodyPr rtlCol="0" anchor="ctr"/>
+          <a:lstStyle/>
+          <a:p>
+            <a:pPr algn="ctr"/>
+            <a:endParaRPr/>
+          </a:p>
+        </p:txBody>
+      </p:sp>
+      <p:sp>
+        <p:nvSpPr>
+          <p:cNvPr id="35" name="TextBox 34"/>
+          <p:cNvSpPr txBox="1"/>
+          <p:nvPr/>
+        </p:nvSpPr>
+        <p:spPr>
+          <a:xfrm>
+            <a:off x="6163055" y="2542032"/>
+            <a:ext cx="2121408" cy="246888"/>
+          </a:xfrm>
+          <a:prstGeom prst="rect">
+            <a:avLst/>
+          </a:prstGeom>
+          <a:noFill/>
+        </p:spPr>
+        <p:txBody>
+          <a:bodyPr wrap="square" lIns="0" tIns="0" rIns="0" bIns="0" anchor="t">
+            <a:spAutoFit/>
+          </a:bodyPr>
+          <a:lstStyle/>
+          <a:p>
+            <a:pPr algn="l"/>
+            <a:r>
+              <a:rPr sz="1010" b="1">
+                <a:solidFill>
+                  <a:srgbClr val="1F5FBF"/>
+                </a:solidFill>
+                <a:latin typeface="Noto Sans"/>
+              </a:rPr>
+              <a:t>APPLICATION</a:t>
+            </a:r>
+          </a:p>
+        </p:txBody>
+      </p:sp>
+      <p:sp>
+        <p:nvSpPr>
+          <p:cNvPr id="36" name="TextBox 35"/>
+          <p:cNvSpPr txBox="1"/>
+          <p:nvPr/>
+        </p:nvSpPr>
+        <p:spPr>
+          <a:xfrm>
+            <a:off x="6163055" y="2834640"/>
+            <a:ext cx="2139696" cy="658368"/>
+          </a:xfrm>
+          <a:prstGeom prst="rect">
+            <a:avLst/>
+          </a:prstGeom>
+          <a:noFill/>
+        </p:spPr>
+        <p:txBody>
+          <a:bodyPr wrap="square" lIns="0" tIns="0" rIns="0" bIns="0" anchor="t">
+            <a:spAutoFit/>
+          </a:bodyPr>
+          <a:lstStyle/>
+          <a:p>
+            <a:pPr algn="l"/>
+            <a:r>
+              <a:rPr sz="1570" b="1">
+                <a:solidFill>
+                  <a:srgbClr val="0F1B2D"/>
+                </a:solidFill>
+                <a:latin typeface="Noto Sans"/>
+              </a:rPr>
+              <a:t>Autoscaling Cloud Run</a:t>
+            </a:r>
+          </a:p>
+        </p:txBody>
+      </p:sp>
+      <p:sp>
+        <p:nvSpPr>
+          <p:cNvPr id="37" name="TextBox 36"/>
+          <p:cNvSpPr txBox="1"/>
+          <p:nvPr/>
+        </p:nvSpPr>
+        <p:spPr>
+          <a:xfrm>
+            <a:off x="6163055" y="3465576"/>
+            <a:ext cx="2139696" cy="393192"/>
+          </a:xfrm>
+          <a:prstGeom prst="rect">
+            <a:avLst/>
+          </a:prstGeom>
+          <a:noFill/>
+        </p:spPr>
+        <p:txBody>
+          <a:bodyPr wrap="square" lIns="0" tIns="0" rIns="0" bIns="0" anchor="t">
+            <a:spAutoFit/>
+          </a:bodyPr>
+          <a:lstStyle/>
+          <a:p>
+            <a:pPr algn="l"/>
+            <a:r>
+              <a:rPr sz="1150" b="0">
+                <a:solidFill>
+                  <a:srgbClr val="3B4656"/>
+                </a:solidFill>
+                <a:latin typeface="Noto Sans"/>
+              </a:rPr>
+              <a:t>Stateless Next.js API;
+auto-scale on demand.</a:t>
+            </a:r>
+          </a:p>
+        </p:txBody>
+      </p:sp>
+      <p:sp>
+        <p:nvSpPr>
+          <p:cNvPr id="38" name="Rounded Rectangle 37"/>
+          <p:cNvSpPr/>
+          <p:nvPr/>
+        </p:nvSpPr>
+        <p:spPr>
+          <a:xfrm>
+            <a:off x="6153912" y="3977639"/>
+            <a:ext cx="2139696" cy="210312"/>
+          </a:xfrm>
+          <a:prstGeom prst="roundRect">
+            <a:avLst>
+              <a:gd name="adj" fmla="val 9000"/>
+            </a:avLst>
+          </a:prstGeom>
+          <a:solidFill>
+            <a:srgbClr val="DBE6F6"/>
+          </a:solidFill>
+          <a:ln>
+            <a:noFill/>
+          </a:ln>
+        </p:spPr>
+        <p:style>
+          <a:lnRef idx="1">
+            <a:schemeClr val="accent1"/>
+          </a:lnRef>
+          <a:fillRef idx="3">
+            <a:schemeClr val="accent1"/>
+          </a:fillRef>
+          <a:effectRef idx="2">
+            <a:schemeClr val="accent1"/>
+          </a:effectRef>
+          <a:fontRef idx="minor">
+            <a:schemeClr val="lt1"/>
+          </a:fontRef>
+        </p:style>
+        <p:txBody>
+          <a:bodyPr rtlCol="0" anchor="ctr"/>
+          <a:lstStyle/>
+          <a:p>
+            <a:pPr algn="ctr"/>
+            <a:endParaRPr/>
+          </a:p>
+        </p:txBody>
+      </p:sp>
+      <p:sp>
+        <p:nvSpPr>
+          <p:cNvPr id="39" name="TextBox 38"/>
+          <p:cNvSpPr txBox="1"/>
+          <p:nvPr/>
+        </p:nvSpPr>
+        <p:spPr>
+          <a:xfrm>
+            <a:off x="6227064" y="4006900"/>
+            <a:ext cx="1993392" cy="128016"/>
+          </a:xfrm>
+          <a:prstGeom prst="rect">
+            <a:avLst/>
+          </a:prstGeom>
+          <a:noFill/>
+        </p:spPr>
+        <p:txBody>
+          <a:bodyPr wrap="square" lIns="0" tIns="0" rIns="0" bIns="0" anchor="t">
+            <a:spAutoFit/>
+          </a:bodyPr>
+          <a:lstStyle/>
+          <a:p>
+            <a:pPr algn="l"/>
+            <a:r>
+              <a:rPr sz="910" b="1">
+                <a:solidFill>
+                  <a:srgbClr val="1F5FBF"/>
+                </a:solidFill>
+                <a:latin typeface="Noto Sans"/>
+              </a:rPr>
+              <a:t>Cost-limited autoscaling</a:t>
+            </a:r>
+          </a:p>
+        </p:txBody>
+      </p:sp>
+      <p:sp>
+        <p:nvSpPr>
+          <p:cNvPr id="40" name="Oval 39"/>
+          <p:cNvSpPr/>
+          <p:nvPr/>
+        </p:nvSpPr>
+        <p:spPr>
+          <a:xfrm>
+            <a:off x="10030968" y="2061972"/>
+            <a:ext cx="246888" cy="246888"/>
+          </a:xfrm>
+          <a:prstGeom prst="ellipse">
+            <a:avLst/>
+          </a:prstGeom>
+          <a:solidFill>
+            <a:srgbClr val="FFFFFF"/>
+          </a:solidFill>
+          <a:ln w="38100">
+            <a:solidFill>
+              <a:srgbClr val="127A4B"/>
+            </a:solidFill>
+          </a:ln>
+        </p:spPr>
+        <p:style>
+          <a:lnRef idx="1">
+            <a:schemeClr val="accent1"/>
+          </a:lnRef>
+          <a:fillRef idx="3">
+            <a:schemeClr val="accent1"/>
+          </a:fillRef>
+          <a:effectRef idx="2">
+            <a:schemeClr val="accent1"/>
+          </a:effectRef>
+          <a:fontRef idx="minor">
+            <a:schemeClr val="lt1"/>
+          </a:fontRef>
+        </p:style>
+        <p:txBody>
+          <a:bodyPr rtlCol="0" anchor="ctr"/>
+          <a:lstStyle/>
+          <a:p>
+            <a:pPr algn="ctr"/>
+            <a:endParaRPr/>
+          </a:p>
+        </p:txBody>
+      </p:sp>
+      <p:sp>
+        <p:nvSpPr>
+          <p:cNvPr id="41" name="TextBox 40"/>
+          <p:cNvSpPr txBox="1"/>
+          <p:nvPr/>
+        </p:nvSpPr>
+        <p:spPr>
+          <a:xfrm>
+            <a:off x="10053828" y="2076602"/>
+            <a:ext cx="201168" cy="201168"/>
+          </a:xfrm>
+          <a:prstGeom prst="rect">
+            <a:avLst/>
+          </a:prstGeom>
+          <a:noFill/>
+        </p:spPr>
+        <p:txBody>
+          <a:bodyPr wrap="square" lIns="0" tIns="0" rIns="0" bIns="0" anchor="t">
+            <a:spAutoFit/>
+          </a:bodyPr>
+          <a:lstStyle/>
+          <a:p>
+            <a:pPr algn="ctr"/>
+            <a:r>
+              <a:rPr sz="1030" b="1">
+                <a:solidFill>
+                  <a:srgbClr val="127A4B"/>
+                </a:solidFill>
+                <a:latin typeface="Noto Sans"/>
+              </a:rPr>
+              <a:t>4</a:t>
+            </a:r>
+          </a:p>
+        </p:txBody>
+      </p:sp>
+      <p:sp>
+        <p:nvSpPr>
+          <p:cNvPr id="42" name="Rounded Rectangle 41"/>
+          <p:cNvSpPr/>
+          <p:nvPr/>
+        </p:nvSpPr>
+        <p:spPr>
+          <a:xfrm>
+            <a:off x="8705088" y="2377440"/>
+            <a:ext cx="2898648" cy="1883664"/>
+          </a:xfrm>
+          <a:prstGeom prst="roundRect">
+            <a:avLst>
+              <a:gd name="adj" fmla="val 5000"/>
+            </a:avLst>
+          </a:prstGeom>
+          <a:solidFill>
+            <a:srgbClr val="FFFFFF"/>
+          </a:solidFill>
+          <a:ln w="11430">
+            <a:solidFill>
+              <a:srgbClr val="CED4D0"/>
+            </a:solidFill>
+          </a:ln>
+        </p:spPr>
+        <p:style>
+          <a:lnRef idx="1">
+            <a:schemeClr val="accent1"/>
+          </a:lnRef>
+          <a:fillRef idx="3">
+            <a:schemeClr val="accent1"/>
+          </a:fillRef>
+          <a:effectRef idx="2">
+            <a:schemeClr val="accent1"/>
+          </a:effectRef>
+          <a:fontRef idx="minor">
+            <a:schemeClr val="lt1"/>
+          </a:fontRef>
+        </p:style>
+        <p:txBody>
+          <a:bodyPr rtlCol="0" anchor="ctr"/>
+          <a:lstStyle/>
+          <a:p>
+            <a:pPr algn="ctr"/>
+            <a:endParaRPr/>
+          </a:p>
+        </p:txBody>
+      </p:sp>
+      <p:sp>
+        <p:nvSpPr>
+          <p:cNvPr id="43" name="Rectangle 42"/>
+          <p:cNvSpPr/>
+          <p:nvPr/>
+        </p:nvSpPr>
+        <p:spPr>
+          <a:xfrm>
+            <a:off x="8705088" y="2377440"/>
+            <a:ext cx="2898648" cy="60350"/>
+          </a:xfrm>
+          <a:prstGeom prst="rect">
+            <a:avLst/>
+          </a:prstGeom>
+          <a:solidFill>
+            <a:srgbClr val="127A4B"/>
+          </a:solidFill>
+          <a:ln>
+            <a:noFill/>
+          </a:ln>
+        </p:spPr>
+        <p:style>
+          <a:lnRef idx="1">
+            <a:schemeClr val="accent1"/>
+          </a:lnRef>
+          <a:fillRef idx="3">
+            <a:schemeClr val="accent1"/>
+          </a:fillRef>
+          <a:effectRef idx="2">
+            <a:schemeClr val="accent1"/>
+          </a:effectRef>
+          <a:fontRef idx="minor">
+            <a:schemeClr val="lt1"/>
+          </a:fontRef>
+        </p:style>
+        <p:txBody>
+          <a:bodyPr rtlCol="0" anchor="ctr"/>
+          <a:lstStyle/>
+          <a:p>
+            <a:pPr algn="ctr"/>
+            <a:endParaRPr/>
+          </a:p>
+        </p:txBody>
+      </p:sp>
+      <p:sp>
+        <p:nvSpPr>
+          <p:cNvPr id="44" name="TextBox 43"/>
+          <p:cNvSpPr txBox="1"/>
+          <p:nvPr/>
+        </p:nvSpPr>
+        <p:spPr>
+          <a:xfrm>
+            <a:off x="8869680" y="2542032"/>
+            <a:ext cx="2569464" cy="246888"/>
+          </a:xfrm>
+          <a:prstGeom prst="rect">
+            <a:avLst/>
+          </a:prstGeom>
+          <a:noFill/>
+        </p:spPr>
+        <p:txBody>
+          <a:bodyPr wrap="square" lIns="0" tIns="0" rIns="0" bIns="0" anchor="t">
+            <a:spAutoFit/>
+          </a:bodyPr>
+          <a:lstStyle/>
+          <a:p>
+            <a:pPr algn="l"/>
+            <a:r>
+              <a:rPr sz="1010" b="1">
+                <a:solidFill>
+                  <a:srgbClr val="127A4B"/>
+                </a:solidFill>
+                <a:latin typeface="Noto Sans"/>
+              </a:rPr>
+              <a:t>CONTENT</a:t>
+            </a:r>
+          </a:p>
+        </p:txBody>
+      </p:sp>
+      <p:sp>
+        <p:nvSpPr>
+          <p:cNvPr id="45" name="TextBox 44"/>
+          <p:cNvSpPr txBox="1"/>
+          <p:nvPr/>
+        </p:nvSpPr>
+        <p:spPr>
+          <a:xfrm>
+            <a:off x="8869680" y="2834640"/>
+            <a:ext cx="2587752" cy="658368"/>
+          </a:xfrm>
+          <a:prstGeom prst="rect">
+            <a:avLst/>
+          </a:prstGeom>
+          <a:noFill/>
+        </p:spPr>
+        <p:txBody>
+          <a:bodyPr wrap="square" lIns="0" tIns="0" rIns="0" bIns="0" anchor="t">
+            <a:spAutoFit/>
+          </a:bodyPr>
+          <a:lstStyle/>
+          <a:p>
+            <a:pPr algn="l"/>
+            <a:r>
+              <a:rPr sz="1570" b="1">
+                <a:solidFill>
+                  <a:srgbClr val="0F1B2D"/>
+                </a:solidFill>
+                <a:latin typeface="Noto Sans"/>
+              </a:rPr>
+              <a:t>Shared lesson catalog</a:t>
+            </a:r>
+          </a:p>
+        </p:txBody>
+      </p:sp>
+      <p:sp>
+        <p:nvSpPr>
+          <p:cNvPr id="46" name="TextBox 45"/>
+          <p:cNvSpPr txBox="1"/>
+          <p:nvPr/>
+        </p:nvSpPr>
+        <p:spPr>
+          <a:xfrm>
+            <a:off x="8869680" y="3465576"/>
+            <a:ext cx="2587752" cy="393192"/>
+          </a:xfrm>
+          <a:prstGeom prst="rect">
+            <a:avLst/>
+          </a:prstGeom>
+          <a:noFill/>
+        </p:spPr>
+        <p:txBody>
+          <a:bodyPr wrap="square" lIns="0" tIns="0" rIns="0" bIns="0" anchor="t">
+            <a:spAutoFit/>
+          </a:bodyPr>
+          <a:lstStyle/>
+          <a:p>
+            <a:pPr algn="l"/>
+            <a:r>
+              <a:rPr sz="1150" b="0">
+                <a:solidFill>
+                  <a:srgbClr val="3B4656"/>
+                </a:solidFill>
+                <a:latin typeface="Noto Sans"/>
+              </a:rPr>
+              <a:t>Cloud Storage + Firestore;
+versioned, reviewed content.</a:t>
+            </a:r>
+          </a:p>
+        </p:txBody>
+      </p:sp>
+      <p:sp>
+        <p:nvSpPr>
+          <p:cNvPr id="47" name="Rounded Rectangle 46"/>
+          <p:cNvSpPr/>
+          <p:nvPr/>
+        </p:nvSpPr>
+        <p:spPr>
+          <a:xfrm>
+            <a:off x="8860536" y="3977639"/>
+            <a:ext cx="2587752" cy="210312"/>
+          </a:xfrm>
+          <a:prstGeom prst="roundRect">
+            <a:avLst>
+              <a:gd name="adj" fmla="val 9000"/>
+            </a:avLst>
+          </a:prstGeom>
+          <a:solidFill>
+            <a:srgbClr val="D6EBDF"/>
+          </a:solidFill>
+          <a:ln>
+            <a:noFill/>
+          </a:ln>
+        </p:spPr>
+        <p:style>
+          <a:lnRef idx="1">
+            <a:schemeClr val="accent1"/>
+          </a:lnRef>
+          <a:fillRef idx="3">
+            <a:schemeClr val="accent1"/>
+          </a:fillRef>
+          <a:effectRef idx="2">
+            <a:schemeClr val="accent1"/>
+          </a:effectRef>
+          <a:fontRef idx="minor">
+            <a:schemeClr val="lt1"/>
+          </a:fontRef>
+        </p:style>
+        <p:txBody>
+          <a:bodyPr rtlCol="0" anchor="ctr"/>
+          <a:lstStyle/>
+          <a:p>
+            <a:pPr algn="ctr"/>
+            <a:endParaRPr/>
+          </a:p>
+        </p:txBody>
+      </p:sp>
+      <p:sp>
+        <p:nvSpPr>
+          <p:cNvPr id="48" name="TextBox 47"/>
+          <p:cNvSpPr txBox="1"/>
+          <p:nvPr/>
+        </p:nvSpPr>
+        <p:spPr>
+          <a:xfrm>
+            <a:off x="8933688" y="4006900"/>
+            <a:ext cx="2441448" cy="128016"/>
+          </a:xfrm>
+          <a:prstGeom prst="rect">
+            <a:avLst/>
+          </a:prstGeom>
+          <a:noFill/>
+        </p:spPr>
+        <p:txBody>
+          <a:bodyPr wrap="square" lIns="0" tIns="0" rIns="0" bIns="0" anchor="t">
+            <a:spAutoFit/>
+          </a:bodyPr>
+          <a:lstStyle/>
+          <a:p>
+            <a:pPr algn="l"/>
+            <a:r>
+              <a:rPr sz="910" b="1">
+                <a:solidFill>
+                  <a:srgbClr val="127A4B"/>
+                </a:solidFill>
+                <a:latin typeface="Noto Sans"/>
+              </a:rPr>
+              <a:t>Regional data controls</a:t>
+            </a:r>
+          </a:p>
+        </p:txBody>
+      </p:sp>
+      <p:sp>
+        <p:nvSpPr>
+          <p:cNvPr id="49" name="TextBox 48"/>
+          <p:cNvSpPr txBox="1"/>
+          <p:nvPr/>
+        </p:nvSpPr>
+        <p:spPr>
+          <a:xfrm>
+            <a:off x="585216" y="4517136"/>
+            <a:ext cx="5394960" cy="228600"/>
+          </a:xfrm>
+          <a:prstGeom prst="rect">
+            <a:avLst/>
+          </a:prstGeom>
+          <a:noFill/>
+        </p:spPr>
+        <p:txBody>
+          <a:bodyPr wrap="square" lIns="0" tIns="0" rIns="0" bIns="0" anchor="t">
+            <a:spAutoFit/>
+          </a:bodyPr>
+          <a:lstStyle/>
+          <a:p>
+            <a:pPr algn="l"/>
+            <a:r>
+              <a:rPr sz="1110" b="1">
+                <a:solidFill>
+                  <a:srgbClr val="1F5FBF"/>
+                </a:solidFill>
+                <a:latin typeface="Noto Sans"/>
+              </a:rPr>
+              <a:t>02   CONTENT CREATION  /  ASYNCHRONOUS</a:t>
+            </a:r>
+          </a:p>
+        </p:txBody>
+      </p:sp>
+      <p:sp>
+        <p:nvSpPr>
+          <p:cNvPr id="50" name="TextBox 49"/>
+          <p:cNvSpPr txBox="1"/>
+          <p:nvPr/>
+        </p:nvSpPr>
+        <p:spPr>
+          <a:xfrm>
+            <a:off x="7424927" y="4517136"/>
+            <a:ext cx="4151376" cy="228600"/>
+          </a:xfrm>
+          <a:prstGeom prst="rect">
+            <a:avLst/>
+          </a:prstGeom>
+          <a:noFill/>
+        </p:spPr>
+        <p:txBody>
+          <a:bodyPr wrap="square" lIns="0" tIns="0" rIns="0" bIns="0" anchor="t">
+            <a:spAutoFit/>
+          </a:bodyPr>
+          <a:lstStyle/>
+          <a:p>
+            <a:pPr algn="r"/>
+            <a:r>
+              <a:rPr sz="1050" b="1">
+                <a:solidFill>
+                  <a:srgbClr val="127A4B"/>
+                </a:solidFill>
+                <a:latin typeface="Noto Sans"/>
+              </a:rPr>
+              <a:t>NO LIVE LLM CALL PER LEARNER</a:t>
+            </a:r>
+          </a:p>
+        </p:txBody>
+      </p:sp>
+      <p:sp>
+        <p:nvSpPr>
+          <p:cNvPr id="51" name="Rounded Rectangle 50"/>
+          <p:cNvSpPr/>
+          <p:nvPr/>
+        </p:nvSpPr>
+        <p:spPr>
+          <a:xfrm>
+            <a:off x="585216" y="4864608"/>
+            <a:ext cx="2404872" cy="768096"/>
+          </a:xfrm>
+          <a:prstGeom prst="roundRect">
+            <a:avLst>
+              <a:gd name="adj" fmla="val 8000"/>
+            </a:avLst>
+          </a:prstGeom>
+          <a:solidFill>
+            <a:srgbClr val="E6E8E3"/>
+          </a:solidFill>
+          <a:ln>
+            <a:noFill/>
+          </a:ln>
+        </p:spPr>
+        <p:style>
+          <a:lnRef idx="1">
+            <a:schemeClr val="accent1"/>
+          </a:lnRef>
+          <a:fillRef idx="3">
+            <a:schemeClr val="accent1"/>
+          </a:fillRef>
+          <a:effectRef idx="2">
+            <a:schemeClr val="accent1"/>
+          </a:effectRef>
+          <a:fontRef idx="minor">
+            <a:schemeClr val="lt1"/>
+          </a:fontRef>
+        </p:style>
+        <p:txBody>
+          <a:bodyPr rtlCol="0" anchor="ctr"/>
+          <a:lstStyle/>
+          <a:p>
+            <a:pPr algn="ctr"/>
+            <a:endParaRPr/>
+          </a:p>
+        </p:txBody>
+      </p:sp>
+      <p:sp>
+        <p:nvSpPr>
+          <p:cNvPr id="52" name="TextBox 51"/>
+          <p:cNvSpPr txBox="1"/>
+          <p:nvPr/>
+        </p:nvSpPr>
+        <p:spPr>
+          <a:xfrm>
+            <a:off x="731520" y="4965192"/>
+            <a:ext cx="2112264" cy="237744"/>
+          </a:xfrm>
+          <a:prstGeom prst="rect">
+            <a:avLst/>
+          </a:prstGeom>
+          <a:noFill/>
+        </p:spPr>
+        <p:txBody>
+          <a:bodyPr wrap="square" lIns="0" tIns="0" rIns="0" bIns="0" anchor="t">
+            <a:spAutoFit/>
+          </a:bodyPr>
+          <a:lstStyle/>
+          <a:p>
+            <a:pPr algn="l"/>
+            <a:r>
+              <a:rPr sz="1330" b="1">
+                <a:solidFill>
+                  <a:srgbClr val="0F1B2D"/>
+                </a:solidFill>
+                <a:latin typeface="Noto Sans"/>
+              </a:rPr>
+              <a:t>Verified country facts</a:t>
+            </a:r>
+          </a:p>
+        </p:txBody>
+      </p:sp>
+      <p:sp>
+        <p:nvSpPr>
+          <p:cNvPr id="53" name="TextBox 52"/>
+          <p:cNvSpPr txBox="1"/>
+          <p:nvPr/>
+        </p:nvSpPr>
+        <p:spPr>
+          <a:xfrm>
+            <a:off x="731520" y="5294376"/>
+            <a:ext cx="2112264" cy="182880"/>
+          </a:xfrm>
+          <a:prstGeom prst="rect">
+            <a:avLst/>
+          </a:prstGeom>
+          <a:noFill/>
+        </p:spPr>
+        <p:txBody>
+          <a:bodyPr wrap="square" lIns="0" tIns="0" rIns="0" bIns="0" anchor="t">
+            <a:spAutoFit/>
+          </a:bodyPr>
+          <a:lstStyle/>
+          <a:p>
+            <a:pPr algn="l"/>
+            <a:r>
+              <a:rPr sz="1030" b="0">
+                <a:solidFill>
+                  <a:srgbClr val="3B4656"/>
+                </a:solidFill>
+                <a:latin typeface="Noto Sans"/>
+              </a:rPr>
+              <a:t>Sources + verified dates</a:t>
+            </a:r>
+          </a:p>
+        </p:txBody>
+      </p:sp>
+      <p:sp>
+        <p:nvSpPr>
+          <p:cNvPr id="54" name="Rounded Rectangle 53"/>
+          <p:cNvSpPr/>
+          <p:nvPr/>
+        </p:nvSpPr>
+        <p:spPr>
+          <a:xfrm>
+            <a:off x="3364992" y="4864608"/>
+            <a:ext cx="2404872" cy="768096"/>
+          </a:xfrm>
+          <a:prstGeom prst="roundRect">
+            <a:avLst>
+              <a:gd name="adj" fmla="val 8000"/>
+            </a:avLst>
+          </a:prstGeom>
+          <a:solidFill>
+            <a:srgbClr val="DBE6F6"/>
+          </a:solidFill>
+          <a:ln>
+            <a:noFill/>
+          </a:ln>
+        </p:spPr>
+        <p:style>
+          <a:lnRef idx="1">
+            <a:schemeClr val="accent1"/>
+          </a:lnRef>
+          <a:fillRef idx="3">
+            <a:schemeClr val="accent1"/>
+          </a:fillRef>
+          <a:effectRef idx="2">
+            <a:schemeClr val="accent1"/>
+          </a:effectRef>
+          <a:fontRef idx="minor">
+            <a:schemeClr val="lt1"/>
+          </a:fontRef>
+        </p:style>
+        <p:txBody>
+          <a:bodyPr rtlCol="0" anchor="ctr"/>
+          <a:lstStyle/>
+          <a:p>
+            <a:pPr algn="ctr"/>
+            <a:endParaRPr/>
+          </a:p>
+        </p:txBody>
+      </p:sp>
+      <p:sp>
+        <p:nvSpPr>
+          <p:cNvPr id="55" name="TextBox 54"/>
+          <p:cNvSpPr txBox="1"/>
+          <p:nvPr/>
+        </p:nvSpPr>
+        <p:spPr>
+          <a:xfrm>
+            <a:off x="3511296" y="4965192"/>
+            <a:ext cx="2112264" cy="237744"/>
+          </a:xfrm>
+          <a:prstGeom prst="rect">
+            <a:avLst/>
+          </a:prstGeom>
+          <a:noFill/>
+        </p:spPr>
+        <p:txBody>
+          <a:bodyPr wrap="square" lIns="0" tIns="0" rIns="0" bIns="0" anchor="t">
+            <a:spAutoFit/>
+          </a:bodyPr>
+          <a:lstStyle/>
+          <a:p>
+            <a:pPr algn="l"/>
+            <a:r>
+              <a:rPr sz="1330" b="1">
+                <a:solidFill>
+                  <a:srgbClr val="0F1B2D"/>
+                </a:solidFill>
+                <a:latin typeface="Noto Sans"/>
+              </a:rPr>
+              <a:t>Queued AI drafts</a:t>
+            </a:r>
+          </a:p>
+        </p:txBody>
+      </p:sp>
+      <p:sp>
+        <p:nvSpPr>
+          <p:cNvPr id="56" name="TextBox 55"/>
+          <p:cNvSpPr txBox="1"/>
+          <p:nvPr/>
+        </p:nvSpPr>
+        <p:spPr>
+          <a:xfrm>
+            <a:off x="3511296" y="5294376"/>
+            <a:ext cx="2112264" cy="182880"/>
+          </a:xfrm>
+          <a:prstGeom prst="rect">
+            <a:avLst/>
+          </a:prstGeom>
+          <a:noFill/>
+        </p:spPr>
+        <p:txBody>
+          <a:bodyPr wrap="square" lIns="0" tIns="0" rIns="0" bIns="0" anchor="t">
+            <a:spAutoFit/>
+          </a:bodyPr>
+          <a:lstStyle/>
+          <a:p>
+            <a:pPr algn="l"/>
+            <a:r>
+              <a:rPr sz="1030" b="0">
+                <a:solidFill>
+                  <a:srgbClr val="3B4656"/>
+                </a:solidFill>
+                <a:latin typeface="Noto Sans"/>
+              </a:rPr>
+              <a:t>Cloud Tasks + EU model</a:t>
+            </a:r>
+          </a:p>
+        </p:txBody>
+      </p:sp>
+      <p:sp>
+        <p:nvSpPr>
+          <p:cNvPr id="57" name="Rounded Rectangle 56"/>
+          <p:cNvSpPr/>
+          <p:nvPr/>
+        </p:nvSpPr>
+        <p:spPr>
+          <a:xfrm>
+            <a:off x="6144768" y="4864608"/>
+            <a:ext cx="2404872" cy="768096"/>
+          </a:xfrm>
+          <a:prstGeom prst="roundRect">
+            <a:avLst>
+              <a:gd name="adj" fmla="val 8000"/>
+            </a:avLst>
+          </a:prstGeom>
+          <a:solidFill>
+            <a:srgbClr val="FBF0C9"/>
+          </a:solidFill>
+          <a:ln>
+            <a:noFill/>
+          </a:ln>
+        </p:spPr>
+        <p:style>
+          <a:lnRef idx="1">
+            <a:schemeClr val="accent1"/>
+          </a:lnRef>
+          <a:fillRef idx="3">
+            <a:schemeClr val="accent1"/>
+          </a:fillRef>
+          <a:effectRef idx="2">
+            <a:schemeClr val="accent1"/>
+          </a:effectRef>
+          <a:fontRef idx="minor">
+            <a:schemeClr val="lt1"/>
+          </a:fontRef>
+        </p:style>
+        <p:txBody>
+          <a:bodyPr rtlCol="0" anchor="ctr"/>
+          <a:lstStyle/>
+          <a:p>
+            <a:pPr algn="ctr"/>
+            <a:endParaRPr/>
+          </a:p>
+        </p:txBody>
+      </p:sp>
+      <p:sp>
+        <p:nvSpPr>
+          <p:cNvPr id="58" name="TextBox 57"/>
+          <p:cNvSpPr txBox="1"/>
+          <p:nvPr/>
+        </p:nvSpPr>
+        <p:spPr>
+          <a:xfrm>
+            <a:off x="6291072" y="4965192"/>
+            <a:ext cx="2112264" cy="237744"/>
+          </a:xfrm>
+          <a:prstGeom prst="rect">
+            <a:avLst/>
+          </a:prstGeom>
+          <a:noFill/>
+        </p:spPr>
+        <p:txBody>
+          <a:bodyPr wrap="square" lIns="0" tIns="0" rIns="0" bIns="0" anchor="t">
+            <a:spAutoFit/>
+          </a:bodyPr>
+          <a:lstStyle/>
+          <a:p>
+            <a:pPr algn="l"/>
+            <a:r>
+              <a:rPr sz="1330" b="1">
+                <a:solidFill>
+                  <a:srgbClr val="0F1B2D"/>
+                </a:solidFill>
+                <a:latin typeface="Noto Sans"/>
+              </a:rPr>
+              <a:t>Review and validate</a:t>
+            </a:r>
+          </a:p>
+        </p:txBody>
+      </p:sp>
+      <p:sp>
+        <p:nvSpPr>
+          <p:cNvPr id="59" name="TextBox 58"/>
+          <p:cNvSpPr txBox="1"/>
+          <p:nvPr/>
+        </p:nvSpPr>
+        <p:spPr>
+          <a:xfrm>
+            <a:off x="6291072" y="5294376"/>
+            <a:ext cx="2112264" cy="182880"/>
+          </a:xfrm>
+          <a:prstGeom prst="rect">
+            <a:avLst/>
+          </a:prstGeom>
+          <a:noFill/>
+        </p:spPr>
+        <p:txBody>
+          <a:bodyPr wrap="square" lIns="0" tIns="0" rIns="0" bIns="0" anchor="t">
+            <a:spAutoFit/>
+          </a:bodyPr>
+          <a:lstStyle/>
+          <a:p>
+            <a:pPr algn="l"/>
+            <a:r>
+              <a:rPr sz="1030" b="0">
+                <a:solidFill>
+                  <a:srgbClr val="3B4656"/>
+                </a:solidFill>
+                <a:latin typeface="Noto Sans"/>
+              </a:rPr>
+              <a:t>Schema + expert approval</a:t>
+            </a:r>
+          </a:p>
+        </p:txBody>
+      </p:sp>
+      <p:sp>
+        <p:nvSpPr>
+          <p:cNvPr id="60" name="Rounded Rectangle 59"/>
+          <p:cNvSpPr/>
+          <p:nvPr/>
+        </p:nvSpPr>
+        <p:spPr>
+          <a:xfrm>
+            <a:off x="8924544" y="4864608"/>
+            <a:ext cx="2679192" cy="768096"/>
+          </a:xfrm>
+          <a:prstGeom prst="roundRect">
+            <a:avLst>
+              <a:gd name="adj" fmla="val 8000"/>
+            </a:avLst>
+          </a:prstGeom>
+          <a:solidFill>
+            <a:srgbClr val="D6EBDF"/>
+          </a:solidFill>
+          <a:ln>
+            <a:noFill/>
+          </a:ln>
+        </p:spPr>
+        <p:style>
+          <a:lnRef idx="1">
+            <a:schemeClr val="accent1"/>
+          </a:lnRef>
+          <a:fillRef idx="3">
+            <a:schemeClr val="accent1"/>
+          </a:fillRef>
+          <a:effectRef idx="2">
+            <a:schemeClr val="accent1"/>
+          </a:effectRef>
+          <a:fontRef idx="minor">
+            <a:schemeClr val="lt1"/>
+          </a:fontRef>
+        </p:style>
+        <p:txBody>
+          <a:bodyPr rtlCol="0" anchor="ctr"/>
+          <a:lstStyle/>
+          <a:p>
+            <a:pPr algn="ctr"/>
+            <a:endParaRPr/>
+          </a:p>
+        </p:txBody>
+      </p:sp>
+      <p:sp>
+        <p:nvSpPr>
+          <p:cNvPr id="61" name="TextBox 60"/>
+          <p:cNvSpPr txBox="1"/>
+          <p:nvPr/>
+        </p:nvSpPr>
+        <p:spPr>
+          <a:xfrm>
+            <a:off x="9070848" y="4965192"/>
+            <a:ext cx="2386584" cy="237744"/>
+          </a:xfrm>
+          <a:prstGeom prst="rect">
+            <a:avLst/>
+          </a:prstGeom>
+          <a:noFill/>
+        </p:spPr>
+        <p:txBody>
+          <a:bodyPr wrap="square" lIns="0" tIns="0" rIns="0" bIns="0" anchor="t">
+            <a:spAutoFit/>
+          </a:bodyPr>
+          <a:lstStyle/>
+          <a:p>
+            <a:pPr algn="l"/>
+            <a:r>
+              <a:rPr sz="1330" b="1">
+                <a:solidFill>
+                  <a:srgbClr val="0F1B2D"/>
+                </a:solidFill>
+                <a:latin typeface="Noto Sans"/>
+              </a:rPr>
+              <a:t>Publish one version</a:t>
+            </a:r>
+          </a:p>
+        </p:txBody>
+      </p:sp>
+      <p:sp>
+        <p:nvSpPr>
+          <p:cNvPr id="62" name="TextBox 61"/>
+          <p:cNvSpPr txBox="1"/>
+          <p:nvPr/>
+        </p:nvSpPr>
+        <p:spPr>
+          <a:xfrm>
+            <a:off x="9070848" y="5294376"/>
+            <a:ext cx="2386584" cy="182880"/>
+          </a:xfrm>
+          <a:prstGeom prst="rect">
+            <a:avLst/>
+          </a:prstGeom>
+          <a:noFill/>
+        </p:spPr>
+        <p:txBody>
+          <a:bodyPr wrap="square" lIns="0" tIns="0" rIns="0" bIns="0" anchor="t">
+            <a:spAutoFit/>
+          </a:bodyPr>
+          <a:lstStyle/>
+          <a:p>
+            <a:pPr algn="l"/>
+            <a:r>
+              <a:rPr sz="1030" b="0">
+                <a:solidFill>
+                  <a:srgbClr val="3B4656"/>
+                </a:solidFill>
+                <a:latin typeface="Noto Sans"/>
+              </a:rPr>
+              <a:t>Reused across all users</a:t>
+            </a:r>
+          </a:p>
+        </p:txBody>
+      </p:sp>
+      <p:cxnSp>
+        <p:nvCxnSpPr>
+          <p:cNvPr id="63" name="Connector 62"/>
+          <p:cNvCxnSpPr/>
+          <p:nvPr/>
+        </p:nvCxnSpPr>
+        <p:spPr>
+          <a:xfrm>
+            <a:off x="3054096" y="5257800"/>
+            <a:ext cx="210312" cy="0"/>
+          </a:xfrm>
+          <a:prstGeom prst="line">
+            <a:avLst/>
+          </a:prstGeom>
+          <a:ln w="22860">
+            <a:solidFill>
+              <a:srgbClr val="0F1B2D"/>
+            </a:solidFill>
+          </a:ln>
+        </p:spPr>
+        <p:style>
+          <a:lnRef idx="2">
+            <a:schemeClr val="accent1"/>
+          </a:lnRef>
+          <a:fillRef idx="0">
+            <a:schemeClr val="accent1"/>
+          </a:fillRef>
+          <a:effectRef idx="1">
+            <a:schemeClr val="accent1"/>
+          </a:effectRef>
+          <a:fontRef idx="minor">
+            <a:schemeClr val="tx1"/>
+          </a:fontRef>
+        </p:style>
+      </p:cxnSp>
+      <p:sp>
+        <p:nvSpPr>
+          <p:cNvPr id="64" name="Chevron 63"/>
+          <p:cNvSpPr/>
+          <p:nvPr/>
+        </p:nvSpPr>
+        <p:spPr>
+          <a:xfrm>
+            <a:off x="3227832" y="5198364"/>
+            <a:ext cx="105156" cy="118872"/>
+          </a:xfrm>
+          <a:prstGeom prst="chevron">
+            <a:avLst/>
+          </a:prstGeom>
+          <a:solidFill>
+            <a:srgbClr val="0F1B2D"/>
+          </a:solidFill>
+          <a:ln>
+            <a:noFill/>
+          </a:ln>
+        </p:spPr>
+        <p:style>
+          <a:lnRef idx="1">
+            <a:schemeClr val="accent1"/>
+          </a:lnRef>
+          <a:fillRef idx="3">
+            <a:schemeClr val="accent1"/>
+          </a:fillRef>
+          <a:effectRef idx="2">
+            <a:schemeClr val="accent1"/>
+          </a:effectRef>
+          <a:fontRef idx="minor">
+            <a:schemeClr val="lt1"/>
+          </a:fontRef>
+        </p:style>
+        <p:txBody>
+          <a:bodyPr rtlCol="0" anchor="ctr"/>
+          <a:lstStyle/>
+          <a:p>
+            <a:pPr algn="ctr"/>
+            <a:endParaRPr/>
+          </a:p>
+        </p:txBody>
+      </p:sp>
+      <p:cxnSp>
+        <p:nvCxnSpPr>
+          <p:cNvPr id="65" name="Connector 64"/>
+          <p:cNvCxnSpPr/>
+          <p:nvPr/>
+        </p:nvCxnSpPr>
+        <p:spPr>
+          <a:xfrm>
+            <a:off x="5833872" y="5257800"/>
+            <a:ext cx="210312" cy="0"/>
+          </a:xfrm>
+          <a:prstGeom prst="line">
+            <a:avLst/>
+          </a:prstGeom>
+          <a:ln w="22860">
+            <a:solidFill>
+              <a:srgbClr val="0F1B2D"/>
+            </a:solidFill>
+          </a:ln>
+        </p:spPr>
+        <p:style>
+          <a:lnRef idx="2">
+            <a:schemeClr val="accent1"/>
+          </a:lnRef>
+          <a:fillRef idx="0">
+            <a:schemeClr val="accent1"/>
+          </a:fillRef>
+          <a:effectRef idx="1">
+            <a:schemeClr val="accent1"/>
+          </a:effectRef>
+          <a:fontRef idx="minor">
+            <a:schemeClr val="tx1"/>
+          </a:fontRef>
+        </p:style>
+      </p:cxnSp>
+      <p:sp>
+        <p:nvSpPr>
+          <p:cNvPr id="66" name="Chevron 65"/>
+          <p:cNvSpPr/>
+          <p:nvPr/>
+        </p:nvSpPr>
+        <p:spPr>
+          <a:xfrm>
+            <a:off x="6007608" y="5198364"/>
+            <a:ext cx="105156" cy="118872"/>
+          </a:xfrm>
+          <a:prstGeom prst="chevron">
+            <a:avLst/>
+          </a:prstGeom>
+          <a:solidFill>
+            <a:srgbClr val="0F1B2D"/>
+          </a:solidFill>
+          <a:ln>
+            <a:noFill/>
+          </a:ln>
+        </p:spPr>
+        <p:style>
+          <a:lnRef idx="1">
+            <a:schemeClr val="accent1"/>
+          </a:lnRef>
+          <a:fillRef idx="3">
+            <a:schemeClr val="accent1"/>
+          </a:fillRef>
+          <a:effectRef idx="2">
+            <a:schemeClr val="accent1"/>
+          </a:effectRef>
+          <a:fontRef idx="minor">
+            <a:schemeClr val="lt1"/>
+          </a:fontRef>
+        </p:style>
+        <p:txBody>
+          <a:bodyPr rtlCol="0" anchor="ctr"/>
+          <a:lstStyle/>
+          <a:p>
+            <a:pPr algn="ctr"/>
+            <a:endParaRPr/>
+          </a:p>
+        </p:txBody>
+      </p:sp>
+      <p:cxnSp>
+        <p:nvCxnSpPr>
+          <p:cNvPr id="67" name="Connector 66"/>
+          <p:cNvCxnSpPr/>
+          <p:nvPr/>
+        </p:nvCxnSpPr>
+        <p:spPr>
+          <a:xfrm>
+            <a:off x="8613648" y="5257800"/>
+            <a:ext cx="210312" cy="0"/>
+          </a:xfrm>
+          <a:prstGeom prst="line">
+            <a:avLst/>
+          </a:prstGeom>
+          <a:ln w="22860">
+            <a:solidFill>
+              <a:srgbClr val="0F1B2D"/>
+            </a:solidFill>
+          </a:ln>
+        </p:spPr>
+        <p:style>
+          <a:lnRef idx="2">
+            <a:schemeClr val="accent1"/>
+          </a:lnRef>
+          <a:fillRef idx="0">
+            <a:schemeClr val="accent1"/>
+          </a:fillRef>
+          <a:effectRef idx="1">
+            <a:schemeClr val="accent1"/>
+          </a:effectRef>
+          <a:fontRef idx="minor">
+            <a:schemeClr val="tx1"/>
+          </a:fontRef>
+        </p:style>
+      </p:cxnSp>
+      <p:sp>
+        <p:nvSpPr>
+          <p:cNvPr id="68" name="Chevron 67"/>
+          <p:cNvSpPr/>
+          <p:nvPr/>
+        </p:nvSpPr>
+        <p:spPr>
+          <a:xfrm>
+            <a:off x="8787384" y="5198364"/>
+            <a:ext cx="105156" cy="118872"/>
+          </a:xfrm>
+          <a:prstGeom prst="chevron">
+            <a:avLst/>
+          </a:prstGeom>
+          <a:solidFill>
+            <a:srgbClr val="0F1B2D"/>
+          </a:solidFill>
+          <a:ln>
+            <a:noFill/>
+          </a:ln>
+        </p:spPr>
+        <p:style>
+          <a:lnRef idx="1">
+            <a:schemeClr val="accent1"/>
+          </a:lnRef>
+          <a:fillRef idx="3">
+            <a:schemeClr val="accent1"/>
+          </a:fillRef>
+          <a:effectRef idx="2">
+            <a:schemeClr val="accent1"/>
+          </a:effectRef>
+          <a:fontRef idx="minor">
+            <a:schemeClr val="lt1"/>
+          </a:fontRef>
+        </p:style>
+        <p:txBody>
+          <a:bodyPr rtlCol="0" anchor="ctr"/>
+          <a:lstStyle/>
+          <a:p>
+            <a:pPr algn="ctr"/>
+            <a:endParaRPr/>
+          </a:p>
+        </p:txBody>
+      </p:sp>
+      <p:sp>
+        <p:nvSpPr>
+          <p:cNvPr id="69" name="Rounded Rectangle 68"/>
+          <p:cNvSpPr/>
+          <p:nvPr/>
+        </p:nvSpPr>
+        <p:spPr>
+          <a:xfrm>
+            <a:off x="585216" y="5879592"/>
+            <a:ext cx="11018520" cy="594360"/>
+          </a:xfrm>
+          <a:prstGeom prst="roundRect">
+            <a:avLst>
+              <a:gd name="adj" fmla="val 3500"/>
+            </a:avLst>
+          </a:prstGeom>
+          <a:solidFill>
+            <a:srgbClr val="0F1B2D"/>
+          </a:solidFill>
+          <a:ln>
+            <a:noFill/>
+          </a:ln>
+        </p:spPr>
+        <p:style>
+          <a:lnRef idx="1">
+            <a:schemeClr val="accent1"/>
+          </a:lnRef>
+          <a:fillRef idx="3">
+            <a:schemeClr val="accent1"/>
+          </a:fillRef>
+          <a:effectRef idx="2">
+            <a:schemeClr val="accent1"/>
+          </a:effectRef>
+          <a:fontRef idx="minor">
+            <a:schemeClr val="lt1"/>
+          </a:fontRef>
+        </p:style>
+        <p:txBody>
+          <a:bodyPr rtlCol="0" anchor="ctr"/>
+          <a:lstStyle/>
+          <a:p>
+            <a:pPr algn="ctr"/>
+            <a:endParaRPr/>
+          </a:p>
+        </p:txBody>
+      </p:sp>
+      <p:sp>
+        <p:nvSpPr>
+          <p:cNvPr id="70" name="TextBox 69"/>
+          <p:cNvSpPr txBox="1"/>
+          <p:nvPr/>
+        </p:nvSpPr>
+        <p:spPr>
+          <a:xfrm>
+            <a:off x="795528" y="6016752"/>
+            <a:ext cx="1426464" cy="228600"/>
+          </a:xfrm>
+          <a:prstGeom prst="rect">
+            <a:avLst/>
+          </a:prstGeom>
+          <a:noFill/>
+        </p:spPr>
+        <p:txBody>
+          <a:bodyPr wrap="square" lIns="0" tIns="0" rIns="0" bIns="0" anchor="t">
+            <a:spAutoFit/>
+          </a:bodyPr>
+          <a:lstStyle/>
+          <a:p>
+            <a:pPr algn="l"/>
+            <a:r>
+              <a:rPr sz="1100" b="1">
+                <a:solidFill>
+                  <a:srgbClr val="FFFFFF"/>
+                </a:solidFill>
+                <a:latin typeface="Noto Sans"/>
+              </a:rPr>
+              <a:t>GUARDRAILS</a:t>
+            </a:r>
+          </a:p>
+        </p:txBody>
+      </p:sp>
+      <p:cxnSp>
+        <p:nvCxnSpPr>
+          <p:cNvPr id="71" name="Connector 70"/>
+          <p:cNvCxnSpPr/>
+          <p:nvPr/>
+        </p:nvCxnSpPr>
+        <p:spPr>
+          <a:xfrm>
+            <a:off x="2240280" y="5989320"/>
+            <a:ext cx="0" cy="374904"/>
+          </a:xfrm>
+          <a:prstGeom prst="line">
+            <a:avLst/>
+          </a:prstGeom>
+          <a:ln w="10160">
+            <a:solidFill>
+              <a:srgbClr val="5A6474"/>
+            </a:solidFill>
+          </a:ln>
+        </p:spPr>
+        <p:style>
+          <a:lnRef idx="2">
+            <a:schemeClr val="accent1"/>
+          </a:lnRef>
+          <a:fillRef idx="0">
+            <a:schemeClr val="accent1"/>
+          </a:fillRef>
+          <a:effectRef idx="1">
+            <a:schemeClr val="accent1"/>
+          </a:effectRef>
+          <a:fontRef idx="minor">
+            <a:schemeClr val="tx1"/>
+          </a:fontRef>
+        </p:style>
+      </p:cxnSp>
+      <p:sp>
+        <p:nvSpPr>
+          <p:cNvPr id="72" name="TextBox 71"/>
+          <p:cNvSpPr txBox="1"/>
+          <p:nvPr/>
+        </p:nvSpPr>
+        <p:spPr>
+          <a:xfrm>
+            <a:off x="2478024" y="6007608"/>
+            <a:ext cx="2743200" cy="320040"/>
+          </a:xfrm>
+          <a:prstGeom prst="rect">
+            <a:avLst/>
+          </a:prstGeom>
+          <a:noFill/>
+        </p:spPr>
+        <p:txBody>
+          <a:bodyPr wrap="square" lIns="0" tIns="0" rIns="0" bIns="0" anchor="t">
+            <a:spAutoFit/>
+          </a:bodyPr>
+          <a:lstStyle/>
+          <a:p>
+            <a:pPr algn="l"/>
+            <a:r>
+              <a:rPr sz="1130" b="0">
+                <a:solidFill>
+                  <a:srgbClr val="FFFFFF"/>
+                </a:solidFill>
+                <a:latin typeface="Noto Sans"/>
+              </a:rPr>
+              <a:t>EU residency + least-privilege IAM</a:t>
+            </a:r>
+          </a:p>
+        </p:txBody>
+      </p:sp>
+      <p:cxnSp>
+        <p:nvCxnSpPr>
+          <p:cNvPr id="73" name="Connector 72"/>
+          <p:cNvCxnSpPr/>
+          <p:nvPr/>
+        </p:nvCxnSpPr>
+        <p:spPr>
+          <a:xfrm>
+            <a:off x="5257800" y="5989320"/>
+            <a:ext cx="0" cy="374904"/>
+          </a:xfrm>
+          <a:prstGeom prst="line">
+            <a:avLst/>
+          </a:prstGeom>
+          <a:ln w="10160">
+            <a:solidFill>
+              <a:srgbClr val="5A6474"/>
+            </a:solidFill>
+          </a:ln>
+        </p:spPr>
+        <p:style>
+          <a:lnRef idx="2">
+            <a:schemeClr val="accent1"/>
+          </a:lnRef>
+          <a:fillRef idx="0">
+            <a:schemeClr val="accent1"/>
+          </a:fillRef>
+          <a:effectRef idx="1">
+            <a:schemeClr val="accent1"/>
+          </a:effectRef>
+          <a:fontRef idx="minor">
+            <a:schemeClr val="tx1"/>
+          </a:fontRef>
+        </p:style>
+      </p:cxnSp>
+      <p:sp>
+        <p:nvSpPr>
+          <p:cNvPr id="74" name="TextBox 73"/>
+          <p:cNvSpPr txBox="1"/>
+          <p:nvPr/>
+        </p:nvSpPr>
+        <p:spPr>
+          <a:xfrm>
+            <a:off x="5495544" y="6007608"/>
+            <a:ext cx="2496312" cy="320040"/>
+          </a:xfrm>
+          <a:prstGeom prst="rect">
+            <a:avLst/>
+          </a:prstGeom>
+          <a:noFill/>
+        </p:spPr>
+        <p:txBody>
+          <a:bodyPr wrap="square" lIns="0" tIns="0" rIns="0" bIns="0" anchor="t">
+            <a:spAutoFit/>
+          </a:bodyPr>
+          <a:lstStyle/>
+          <a:p>
+            <a:pPr algn="l"/>
+            <a:r>
+              <a:rPr sz="1130" b="0">
+                <a:solidFill>
+                  <a:srgbClr val="FFFFFF"/>
+                </a:solidFill>
+                <a:latin typeface="Noto Sans"/>
+              </a:rPr>
+              <a:t>SLOs, logs + cost alerts</a:t>
+            </a:r>
+          </a:p>
+        </p:txBody>
+      </p:sp>
+      <p:cxnSp>
+        <p:nvCxnSpPr>
+          <p:cNvPr id="75" name="Connector 74"/>
+          <p:cNvCxnSpPr/>
+          <p:nvPr/>
+        </p:nvCxnSpPr>
+        <p:spPr>
+          <a:xfrm>
+            <a:off x="8092440" y="5989320"/>
+            <a:ext cx="0" cy="374904"/>
+          </a:xfrm>
+          <a:prstGeom prst="line">
+            <a:avLst/>
+          </a:prstGeom>
+          <a:ln w="10160">
+            <a:solidFill>
+              <a:srgbClr val="5A6474"/>
+            </a:solidFill>
+          </a:ln>
+        </p:spPr>
+        <p:style>
+          <a:lnRef idx="2">
+            <a:schemeClr val="accent1"/>
+          </a:lnRef>
+          <a:fillRef idx="0">
+            <a:schemeClr val="accent1"/>
+          </a:fillRef>
+          <a:effectRef idx="1">
+            <a:schemeClr val="accent1"/>
+          </a:effectRef>
+          <a:fontRef idx="minor">
+            <a:schemeClr val="tx1"/>
+          </a:fontRef>
+        </p:style>
+      </p:cxnSp>
+      <p:sp>
+        <p:nvSpPr>
+          <p:cNvPr id="76" name="TextBox 75"/>
+          <p:cNvSpPr txBox="1"/>
+          <p:nvPr/>
+        </p:nvSpPr>
+        <p:spPr>
+          <a:xfrm>
+            <a:off x="8311896" y="6007608"/>
+            <a:ext cx="3035808" cy="320040"/>
+          </a:xfrm>
+          <a:prstGeom prst="rect">
+            <a:avLst/>
+          </a:prstGeom>
+          <a:noFill/>
+        </p:spPr>
+        <p:txBody>
+          <a:bodyPr wrap="square" lIns="0" tIns="0" rIns="0" bIns="0" anchor="t">
+            <a:spAutoFit/>
+          </a:bodyPr>
+          <a:lstStyle/>
+          <a:p>
+            <a:pPr algn="l"/>
+            <a:r>
+              <a:rPr sz="1130" b="0">
+                <a:solidFill>
+                  <a:srgbClr val="FFFFFF"/>
+                </a:solidFill>
+                <a:latin typeface="Noto Sans"/>
+              </a:rPr>
+              <a:t>Review gates + safe rollbacks</a:t>
+            </a:r>
+          </a:p>
+        </p:txBody>
+      </p:sp>
+      <p:sp>
+        <p:nvSpPr>
+          <p:cNvPr id="77" name="TextBox 76"/>
+          <p:cNvSpPr txBox="1"/>
+          <p:nvPr/>
+        </p:nvSpPr>
+        <p:spPr>
+          <a:xfrm>
+            <a:off x="594360" y="6565392"/>
+            <a:ext cx="9601200" cy="164592"/>
+          </a:xfrm>
+          <a:prstGeom prst="rect">
+            <a:avLst/>
+          </a:prstGeom>
+          <a:noFill/>
+        </p:spPr>
+        <p:txBody>
+          <a:bodyPr wrap="square" lIns="0" tIns="0" rIns="0" bIns="0" anchor="t">
+            <a:spAutoFit/>
+          </a:bodyPr>
+          <a:lstStyle/>
+          <a:p>
+            <a:pPr algn="l"/>
+            <a:r>
+              <a:rPr sz="900" b="0">
                 <a:solidFill>
                   <a:srgbClr val="5A6474"/>
                 </a:solidFill>
-                <a:latin typeface="Atkinson Hyperlegible Next" pitchFamily="34" charset="0"/>
-                <a:ea typeface="Atkinson Hyperlegible Next" pitchFamily="34" charset="-122"/>
-                <a:cs typeface="Atkinson Hyperlegible Next" pitchFamily="34" charset="-120"/>
+                <a:latin typeface="Noto Sans"/>
               </a:rPr>
-              <a:t>ROOTED · INNOVATE WITH DB 2026</a:t>
+              <a:t>Rollout: launch in one region → add regional failover and enterprise SSO when justified by demand.</a:t>
             </a:r>
-            <a:endParaRPr lang="en-US" sz="810" dirty="0"/>
-          </a:p>
-        </p:txBody>
-      </p:sp>
-      <p:sp>
-        <p:nvSpPr>
-          <p:cNvPr id="8" name="Text 6"/>
-          <p:cNvSpPr/>
-          <p:nvPr/>
-        </p:nvSpPr>
-        <p:spPr>
-          <a:xfrm>
-            <a:off x="11064240" y="6537960"/>
-            <a:ext cx="502920" cy="155448"/>
-          </a:xfrm>
-          <a:prstGeom prst="rect">
-            <a:avLst/>
-          </a:prstGeom>
-          <a:noFill/>
-          <a:ln/>
-        </p:spPr>
-        <p:txBody>
-          <a:bodyPr wrap="square" lIns="0" tIns="0" rIns="0" bIns="0" rtlCol="0" anchor="ctr">
-            <a:normAutofit/>
+          </a:p>
+        </p:txBody>
+      </p:sp>
+      <p:sp>
+        <p:nvSpPr>
+          <p:cNvPr id="78" name="TextBox 77"/>
+          <p:cNvSpPr txBox="1"/>
+          <p:nvPr/>
+        </p:nvSpPr>
+        <p:spPr>
+          <a:xfrm>
+            <a:off x="10972800" y="6547104"/>
+            <a:ext cx="603504" cy="182880"/>
+          </a:xfrm>
+          <a:prstGeom prst="rect">
+            <a:avLst/>
+          </a:prstGeom>
+          <a:noFill/>
+        </p:spPr>
+        <p:txBody>
+          <a:bodyPr wrap="square" lIns="0" tIns="0" rIns="0" bIns="0" anchor="t">
+            <a:spAutoFit/>
           </a:bodyPr>
           <a:lstStyle/>
           <a:p>
-            <a:pPr marL="0" indent="0" algn="r">
-              <a:buNone/>
-            </a:pPr>
+            <a:pPr algn="r"/>
             <a:r>
-              <a:rPr lang="en-US" sz="900" b="1" dirty="0">
+              <a:rPr sz="919" b="1">
                 <a:solidFill>
                   <a:srgbClr val="5A6474"/>
                 </a:solidFill>
-                <a:latin typeface="Atkinson Hyperlegible Next" pitchFamily="34" charset="0"/>
-                <a:ea typeface="Atkinson Hyperlegible Next" pitchFamily="34" charset="-122"/>
-                <a:cs typeface="Atkinson Hyperlegible Next" pitchFamily="34" charset="-120"/>
+                <a:latin typeface="Noto Sans"/>
               </a:rPr>
-              <a:t>11</a:t>
+              <a:t>01 / 01</a:t>
             </a:r>
-            <a:endParaRPr lang="en-US" sz="900" dirty="0"/>
-          </a:p>
-        </p:txBody>
-      </p:sp>
-      <p:sp>
-        <p:nvSpPr>
-          <p:cNvPr id="9" name="Shape 7"/>
-          <p:cNvSpPr/>
-          <p:nvPr/>
-        </p:nvSpPr>
-        <p:spPr>
-          <a:xfrm>
-            <a:off x="649224" y="2368296"/>
-            <a:ext cx="5312664" cy="3310128"/>
-          </a:xfrm>
-          <a:prstGeom prst="roundRect">
-            <a:avLst>
-              <a:gd name="adj" fmla="val 1657"/>
-            </a:avLst>
-          </a:prstGeom>
-          <a:solidFill>
-            <a:srgbClr val="FFFFFF"/>
-          </a:solidFill>
-          <a:ln w="12700">
-            <a:solidFill>
-              <a:srgbClr val="FFFFFF">
-                <a:alpha val="0"/>
-              </a:srgbClr>
-            </a:solidFill>
-            <a:prstDash val="solid"/>
-          </a:ln>
-        </p:spPr>
-        <p:txBody>
-          <a:bodyPr/>
-          <a:lstStyle/>
-          <a:p>
-            <a:endParaRPr lang="en-US"/>
-          </a:p>
-        </p:txBody>
-      </p:sp>
-      <p:sp>
-        <p:nvSpPr>
-          <p:cNvPr id="10" name="Shape 8"/>
-          <p:cNvSpPr/>
-          <p:nvPr/>
-        </p:nvSpPr>
-        <p:spPr>
-          <a:xfrm>
-            <a:off x="649224" y="2368296"/>
-            <a:ext cx="5312664" cy="100584"/>
-          </a:xfrm>
-          <a:prstGeom prst="roundRect">
-            <a:avLst>
-              <a:gd name="adj" fmla="val 54545"/>
-            </a:avLst>
-          </a:prstGeom>
-          <a:solidFill>
-            <a:srgbClr val="127A4B"/>
-          </a:solidFill>
-          <a:ln w="12700">
-            <a:solidFill>
-              <a:srgbClr val="127A4B">
-                <a:alpha val="0"/>
-              </a:srgbClr>
-            </a:solidFill>
-            <a:prstDash val="solid"/>
-          </a:ln>
-        </p:spPr>
-        <p:txBody>
-          <a:bodyPr/>
-          <a:lstStyle/>
-          <a:p>
-            <a:endParaRPr lang="en-US"/>
-          </a:p>
-        </p:txBody>
-      </p:sp>
-      <p:sp>
-        <p:nvSpPr>
-          <p:cNvPr id="11" name="Text 9"/>
-          <p:cNvSpPr/>
-          <p:nvPr/>
-        </p:nvSpPr>
-        <p:spPr>
-          <a:xfrm>
-            <a:off x="969264" y="2679192"/>
-            <a:ext cx="4700016" cy="347472"/>
-          </a:xfrm>
-          <a:prstGeom prst="rect">
-            <a:avLst/>
-          </a:prstGeom>
-          <a:noFill/>
-          <a:ln/>
-        </p:spPr>
-        <p:txBody>
-          <a:bodyPr wrap="square" lIns="0" tIns="0" rIns="0" bIns="0" rtlCol="0" anchor="ctr">
-            <a:normAutofit/>
-          </a:bodyPr>
-          <a:lstStyle/>
-          <a:p>
-            <a:pPr marL="0" indent="0" algn="l">
-              <a:buNone/>
-            </a:pPr>
-            <a:r>
-              <a:rPr lang="en-US" sz="1800" b="1" dirty="0">
-                <a:solidFill>
-                  <a:srgbClr val="127A4B"/>
-                </a:solidFill>
-                <a:latin typeface="Atkinson Hyperlegible Next" pitchFamily="34" charset="0"/>
-                <a:ea typeface="Atkinson Hyperlegible Next" pitchFamily="34" charset="-122"/>
-                <a:cs typeface="Atkinson Hyperlegible Next" pitchFamily="34" charset="-120"/>
-              </a:rPr>
-              <a:t>BUILT IN THE MVP</a:t>
-            </a:r>
-            <a:endParaRPr lang="en-US" sz="1800" dirty="0"/>
-          </a:p>
-        </p:txBody>
-      </p:sp>
-      <p:sp>
-        <p:nvSpPr>
-          <p:cNvPr id="12" name="Text 10"/>
-          <p:cNvSpPr/>
-          <p:nvPr/>
-        </p:nvSpPr>
-        <p:spPr>
-          <a:xfrm>
-            <a:off x="978408" y="3264408"/>
-            <a:ext cx="4572000" cy="2066544"/>
-          </a:xfrm>
-          <a:prstGeom prst="rect">
-            <a:avLst/>
-          </a:prstGeom>
-          <a:noFill/>
-          <a:ln/>
-        </p:spPr>
-        <p:txBody>
-          <a:bodyPr wrap="square" lIns="0" tIns="0" rIns="0" bIns="0" rtlCol="0" anchor="ctr">
-            <a:normAutofit/>
-          </a:bodyPr>
-          <a:lstStyle/>
-          <a:p>
-            <a:pPr marL="0" indent="0" algn="l">
-              <a:buNone/>
-            </a:pPr>
-            <a:r>
-              <a:rPr lang="en-US" sz="1600" dirty="0">
-                <a:solidFill>
-                  <a:srgbClr val="3B4656"/>
-                </a:solidFill>
-                <a:latin typeface="Atkinson Hyperlegible Next" pitchFamily="34" charset="0"/>
-                <a:ea typeface="Atkinson Hyperlegible Next" pitchFamily="34" charset="-122"/>
-                <a:cs typeface="Atkinson Hyperlegible Next" pitchFamily="34" charset="-120"/>
-              </a:rPr>
-              <a:t>Browser-local profile and game</a:t>
-            </a:r>
-            <a:endParaRPr lang="en-US" sz="1600" dirty="0"/>
-          </a:p>
-          <a:p>
-            <a:pPr marL="0" indent="0" algn="l">
-              <a:buNone/>
-            </a:pPr>
-            <a:r>
-              <a:rPr lang="en-US" sz="1600" dirty="0">
-                <a:solidFill>
-                  <a:srgbClr val="3B4656"/>
-                </a:solidFill>
-                <a:latin typeface="Atkinson Hyperlegible Next" pitchFamily="34" charset="0"/>
-                <a:ea typeface="Atkinson Hyperlegible Next" pitchFamily="34" charset="-122"/>
-                <a:cs typeface="Atkinson Hyperlegible Next" pitchFamily="34" charset="-120"/>
-              </a:rPr>
-              <a:t>No user accounts</a:t>
-            </a:r>
-            <a:endParaRPr lang="en-US" sz="1600" dirty="0"/>
-          </a:p>
-          <a:p>
-            <a:pPr marL="0" indent="0" algn="l">
-              <a:buNone/>
-            </a:pPr>
-            <a:r>
-              <a:rPr lang="en-US" sz="1600" dirty="0">
-                <a:solidFill>
-                  <a:srgbClr val="3B4656"/>
-                </a:solidFill>
-                <a:latin typeface="Atkinson Hyperlegible Next" pitchFamily="34" charset="0"/>
-                <a:ea typeface="Atkinson Hyperlegible Next" pitchFamily="34" charset="-122"/>
-                <a:cs typeface="Atkinson Hyperlegible Next" pitchFamily="34" charset="-120"/>
-              </a:rPr>
-              <a:t>Zod-validated lesson requests</a:t>
-            </a:r>
-            <a:endParaRPr lang="en-US" sz="1600" dirty="0"/>
-          </a:p>
-          <a:p>
-            <a:pPr marL="0" indent="0" algn="l">
-              <a:buNone/>
-            </a:pPr>
-            <a:r>
-              <a:rPr lang="en-US" sz="1600" dirty="0">
-                <a:solidFill>
-                  <a:srgbClr val="3B4656"/>
-                </a:solidFill>
-                <a:latin typeface="Atkinson Hyperlegible Next" pitchFamily="34" charset="0"/>
-                <a:ea typeface="Atkinson Hyperlegible Next" pitchFamily="34" charset="-122"/>
-                <a:cs typeface="Atkinson Hyperlegible Next" pitchFamily="34" charset="-120"/>
-              </a:rPr>
-              <a:t>Source-dated country packs</a:t>
-            </a:r>
-            <a:endParaRPr lang="en-US" sz="1600" dirty="0"/>
-          </a:p>
-          <a:p>
-            <a:pPr marL="0" indent="0" algn="l">
-              <a:buNone/>
-            </a:pPr>
-            <a:r>
-              <a:rPr lang="en-US" sz="1600" dirty="0">
-                <a:solidFill>
-                  <a:srgbClr val="3B4656"/>
-                </a:solidFill>
-                <a:latin typeface="Atkinson Hyperlegible Next" pitchFamily="34" charset="0"/>
-                <a:ea typeface="Atkinson Hyperlegible Next" pitchFamily="34" charset="-122"/>
-                <a:cs typeface="Atkinson Hyperlegible Next" pitchFamily="34" charset="-120"/>
-              </a:rPr>
-              <a:t>Cached / saved offline lessons</a:t>
-            </a:r>
-            <a:endParaRPr lang="en-US" sz="1600" dirty="0"/>
-          </a:p>
-          <a:p>
-            <a:pPr marL="0" indent="0" algn="l">
-              <a:buNone/>
-            </a:pPr>
-            <a:r>
-              <a:rPr lang="en-US" sz="1600" dirty="0">
-                <a:solidFill>
-                  <a:srgbClr val="3B4656"/>
-                </a:solidFill>
-                <a:latin typeface="Atkinson Hyperlegible Next" pitchFamily="34" charset="0"/>
-                <a:ea typeface="Atkinson Hyperlegible Next" pitchFamily="34" charset="-122"/>
-                <a:cs typeface="Atkinson Hyperlegible Next" pitchFamily="34" charset="-120"/>
-              </a:rPr>
-              <a:t>Automated tests and checks</a:t>
-            </a:r>
-            <a:endParaRPr lang="en-US" sz="1600" dirty="0"/>
-          </a:p>
-        </p:txBody>
-      </p:sp>
-      <p:sp>
-        <p:nvSpPr>
-          <p:cNvPr id="13" name="Shape 11"/>
-          <p:cNvSpPr/>
-          <p:nvPr/>
-        </p:nvSpPr>
-        <p:spPr>
-          <a:xfrm>
-            <a:off x="6190488" y="2368296"/>
-            <a:ext cx="5349240" cy="3310128"/>
-          </a:xfrm>
-          <a:prstGeom prst="roundRect">
-            <a:avLst>
-              <a:gd name="adj" fmla="val 1657"/>
-            </a:avLst>
-          </a:prstGeom>
-          <a:solidFill>
-            <a:srgbClr val="0F1B2D"/>
-          </a:solidFill>
-          <a:ln w="12700">
-            <a:solidFill>
-              <a:srgbClr val="0F1B2D">
-                <a:alpha val="0"/>
-              </a:srgbClr>
-            </a:solidFill>
-            <a:prstDash val="solid"/>
-          </a:ln>
-        </p:spPr>
-        <p:txBody>
-          <a:bodyPr/>
-          <a:lstStyle/>
-          <a:p>
-            <a:endParaRPr lang="en-US"/>
-          </a:p>
-        </p:txBody>
-      </p:sp>
-      <p:sp>
-        <p:nvSpPr>
-          <p:cNvPr id="14" name="Shape 12"/>
-          <p:cNvSpPr/>
-          <p:nvPr/>
-        </p:nvSpPr>
-        <p:spPr>
-          <a:xfrm>
-            <a:off x="6190488" y="2368296"/>
-            <a:ext cx="5349240" cy="100584"/>
-          </a:xfrm>
-          <a:prstGeom prst="roundRect">
-            <a:avLst>
-              <a:gd name="adj" fmla="val 54545"/>
-            </a:avLst>
-          </a:prstGeom>
-          <a:solidFill>
-            <a:srgbClr val="1F5FBF"/>
-          </a:solidFill>
-          <a:ln w="12700">
-            <a:solidFill>
-              <a:srgbClr val="1F5FBF">
-                <a:alpha val="0"/>
-              </a:srgbClr>
-            </a:solidFill>
-            <a:prstDash val="solid"/>
-          </a:ln>
-        </p:spPr>
-        <p:txBody>
-          <a:bodyPr/>
-          <a:lstStyle/>
-          <a:p>
-            <a:endParaRPr lang="en-US"/>
-          </a:p>
-        </p:txBody>
-      </p:sp>
-      <p:sp>
-        <p:nvSpPr>
-          <p:cNvPr id="15" name="Text 13"/>
-          <p:cNvSpPr/>
-          <p:nvPr/>
-        </p:nvSpPr>
-        <p:spPr>
-          <a:xfrm>
-            <a:off x="6492240" y="2679192"/>
-            <a:ext cx="4672584" cy="347472"/>
-          </a:xfrm>
-          <a:prstGeom prst="rect">
-            <a:avLst/>
-          </a:prstGeom>
-          <a:noFill/>
-          <a:ln/>
-        </p:spPr>
-        <p:txBody>
-          <a:bodyPr wrap="square" lIns="0" tIns="0" rIns="0" bIns="0" rtlCol="0" anchor="ctr">
-            <a:normAutofit/>
-          </a:bodyPr>
-          <a:lstStyle/>
-          <a:p>
-            <a:pPr marL="0" indent="0" algn="l">
-              <a:buNone/>
-            </a:pPr>
-            <a:r>
-              <a:rPr lang="en-US" sz="1700" b="1" dirty="0">
-                <a:solidFill>
-                  <a:srgbClr val="FFFFFF"/>
-                </a:solidFill>
-                <a:latin typeface="Atkinson Hyperlegible Next" pitchFamily="34" charset="0"/>
-                <a:ea typeface="Atkinson Hyperlegible Next" pitchFamily="34" charset="-122"/>
-                <a:cs typeface="Atkinson Hyperlegible Next" pitchFamily="34" charset="-120"/>
-              </a:rPr>
-              <a:t>PROPOSED PRODUCTION TARGET</a:t>
-            </a:r>
-            <a:endParaRPr lang="en-US" sz="1700" dirty="0"/>
-          </a:p>
-        </p:txBody>
-      </p:sp>
-      <p:sp>
-        <p:nvSpPr>
-          <p:cNvPr id="16" name="Text 14"/>
-          <p:cNvSpPr/>
-          <p:nvPr/>
-        </p:nvSpPr>
-        <p:spPr>
-          <a:xfrm>
-            <a:off x="6519672" y="3264408"/>
-            <a:ext cx="4617720" cy="2103120"/>
-          </a:xfrm>
-          <a:prstGeom prst="rect">
-            <a:avLst/>
-          </a:prstGeom>
-          <a:noFill/>
-          <a:ln/>
-        </p:spPr>
-        <p:txBody>
-          <a:bodyPr wrap="square" lIns="0" tIns="0" rIns="0" bIns="0" rtlCol="0" anchor="ctr">
-            <a:normAutofit/>
-          </a:bodyPr>
-          <a:lstStyle/>
-          <a:p>
-            <a:pPr marL="0" indent="0" algn="l">
-              <a:buNone/>
-            </a:pPr>
-            <a:r>
-              <a:rPr lang="en-US" sz="1570" dirty="0">
-                <a:solidFill>
-                  <a:srgbClr val="D5DFE9"/>
-                </a:solidFill>
-                <a:latin typeface="Atkinson Hyperlegible Next" pitchFamily="34" charset="0"/>
-                <a:ea typeface="Atkinson Hyperlegible Next" pitchFamily="34" charset="-122"/>
-                <a:cs typeface="Atkinson Hyperlegible Next" pitchFamily="34" charset="-120"/>
-              </a:rPr>
-              <a:t>EU-resident model serving</a:t>
-            </a:r>
-            <a:endParaRPr lang="en-US" sz="1570" dirty="0"/>
-          </a:p>
-          <a:p>
-            <a:pPr marL="0" indent="0" algn="l">
-              <a:buNone/>
-            </a:pPr>
-            <a:r>
-              <a:rPr lang="en-US" sz="1570" dirty="0">
-                <a:solidFill>
-                  <a:srgbClr val="D5DFE9"/>
-                </a:solidFill>
-                <a:latin typeface="Atkinson Hyperlegible Next" pitchFamily="34" charset="0"/>
-                <a:ea typeface="Atkinson Hyperlegible Next" pitchFamily="34" charset="-122"/>
-                <a:cs typeface="Atkinson Hyperlegible Next" pitchFamily="34" charset="-120"/>
-              </a:rPr>
-              <a:t>Encryption + zero-trust controls</a:t>
-            </a:r>
-            <a:endParaRPr lang="en-US" sz="1570" dirty="0"/>
-          </a:p>
-          <a:p>
-            <a:pPr marL="0" indent="0" algn="l">
-              <a:buNone/>
-            </a:pPr>
-            <a:r>
-              <a:rPr lang="en-US" sz="1570" dirty="0">
-                <a:solidFill>
-                  <a:srgbClr val="D5DFE9"/>
-                </a:solidFill>
-                <a:latin typeface="Atkinson Hyperlegible Next" pitchFamily="34" charset="0"/>
-                <a:ea typeface="Atkinson Hyperlegible Next" pitchFamily="34" charset="-122"/>
-                <a:cs typeface="Atkinson Hyperlegible Next" pitchFamily="34" charset="-120"/>
-              </a:rPr>
-              <a:t>Auditing and observability</a:t>
-            </a:r>
-            <a:endParaRPr lang="en-US" sz="1570" dirty="0"/>
-          </a:p>
-          <a:p>
-            <a:pPr marL="0" indent="0" algn="l">
-              <a:buNone/>
-            </a:pPr>
-            <a:r>
-              <a:rPr lang="en-US" sz="1570" dirty="0">
-                <a:solidFill>
-                  <a:srgbClr val="D5DFE9"/>
-                </a:solidFill>
-                <a:latin typeface="Atkinson Hyperlegible Next" pitchFamily="34" charset="0"/>
-                <a:ea typeface="Atkinson Hyperlegible Next" pitchFamily="34" charset="-122"/>
-                <a:cs typeface="Atkinson Hyperlegible Next" pitchFamily="34" charset="-120"/>
-              </a:rPr>
-              <a:t>Governed content review</a:t>
-            </a:r>
-            <a:endParaRPr lang="en-US" sz="1570" dirty="0"/>
-          </a:p>
-          <a:p>
-            <a:pPr marL="0" indent="0" algn="l">
-              <a:buNone/>
-            </a:pPr>
-            <a:r>
-              <a:rPr lang="en-US" sz="1570" dirty="0">
-                <a:solidFill>
-                  <a:srgbClr val="D5DFE9"/>
-                </a:solidFill>
-                <a:latin typeface="Atkinson Hyperlegible Next" pitchFamily="34" charset="0"/>
-                <a:ea typeface="Atkinson Hyperlegible Next" pitchFamily="34" charset="-122"/>
-                <a:cs typeface="Atkinson Hyperlegible Next" pitchFamily="34" charset="-120"/>
-              </a:rPr>
-              <a:t>Privacy / accessibility controls</a:t>
-            </a:r>
-            <a:endParaRPr lang="en-US" sz="1570" dirty="0"/>
-          </a:p>
-          <a:p>
-            <a:pPr marL="0" indent="0" algn="l">
-              <a:buNone/>
-            </a:pPr>
-            <a:r>
-              <a:rPr lang="en-US" sz="1570" dirty="0">
-                <a:solidFill>
-                  <a:srgbClr val="D5DFE9"/>
-                </a:solidFill>
-                <a:latin typeface="Atkinson Hyperlegible Next" pitchFamily="34" charset="0"/>
-                <a:ea typeface="Atkinson Hyperlegible Next" pitchFamily="34" charset="-122"/>
-                <a:cs typeface="Atkinson Hyperlegible Next" pitchFamily="34" charset="-120"/>
-              </a:rPr>
-              <a:t>GDPR · DORA · EU AI Act alignment</a:t>
-            </a:r>
-            <a:endParaRPr lang="en-US" sz="1570" dirty="0"/>
-          </a:p>
-        </p:txBody>
-      </p:sp>
-      <p:sp>
-        <p:nvSpPr>
-          <p:cNvPr id="17" name="Text 15"/>
-          <p:cNvSpPr/>
-          <p:nvPr/>
-        </p:nvSpPr>
-        <p:spPr>
-          <a:xfrm>
-            <a:off x="704088" y="5925312"/>
-            <a:ext cx="10881360" cy="310896"/>
-          </a:xfrm>
-          <a:prstGeom prst="rect">
-            <a:avLst/>
-          </a:prstGeom>
-          <a:noFill/>
-          <a:ln/>
-        </p:spPr>
-        <p:txBody>
-          <a:bodyPr wrap="square" lIns="0" tIns="0" rIns="0" bIns="0" rtlCol="0" anchor="ctr">
-            <a:normAutofit/>
-          </a:bodyPr>
-          <a:lstStyle/>
-          <a:p>
-            <a:pPr marL="0" indent="0" algn="l">
-              <a:buNone/>
-            </a:pPr>
-            <a:r>
-              <a:rPr lang="en-US" sz="1180" dirty="0">
-                <a:solidFill>
-                  <a:srgbClr val="3B4656"/>
-                </a:solidFill>
-                <a:latin typeface="Atkinson Hyperlegible Next" pitchFamily="34" charset="0"/>
-                <a:ea typeface="Atkinson Hyperlegible Next" pitchFamily="34" charset="-122"/>
-                <a:cs typeface="Atkinson Hyperlegible Next" pitchFamily="34" charset="-120"/>
-              </a:rPr>
-              <a:t>Target direction: Vertex AI in the EU. These controls require engineering and validation beyond the hackathon.</a:t>
-            </a:r>
-            <a:endParaRPr lang="en-US" sz="1180" dirty="0"/>
           </a:p>
         </p:txBody>
       </p:sp>
@@ -4568,4 +6875,257 @@
     </a:ext>
   </a:extLst>
 </a:theme>
+</file>
+
+<file path=customXml/item1.xml><?xml version="1.0" encoding="utf-8"?>
+<ct:contentTypeSchema xmlns:ct="http://schemas.microsoft.com/office/2006/metadata/contentType" xmlns:ma="http://schemas.microsoft.com/office/2006/metadata/properties/metaAttributes" ct:_="" ma:_="" ma:contentTypeName="Document" ma:contentTypeID="0x010100518760E7A0A94143BBEC27D16016415A" ma:contentTypeVersion="12" ma:contentTypeDescription="Create a new document." ma:contentTypeScope="" ma:versionID="3e1146a7d087b4caf0f2f0827912332f">
+  <xsd:schema xmlns:xsd="http://www.w3.org/2001/XMLSchema" xmlns:xs="http://www.w3.org/2001/XMLSchema" xmlns:p="http://schemas.microsoft.com/office/2006/metadata/properties" xmlns:ns3="1fa6e5a6-829c-4781-a3ea-170c3654358c" targetNamespace="http://schemas.microsoft.com/office/2006/metadata/properties" ma:root="true" ma:fieldsID="09a8faa9749ba3d485b6d129e5255aa7" ns3:_="">
+    <xsd:import namespace="1fa6e5a6-829c-4781-a3ea-170c3654358c"/>
+    <xsd:element name="properties">
+      <xsd:complexType>
+        <xsd:sequence>
+          <xsd:element name="documentManagement">
+            <xsd:complexType>
+              <xsd:all>
+                <xsd:element ref="ns3:MediaServiceMetadata" minOccurs="0"/>
+                <xsd:element ref="ns3:MediaServiceFastMetadata" minOccurs="0"/>
+                <xsd:element ref="ns3:MediaServiceObjectDetectorVersions" minOccurs="0"/>
+                <xsd:element ref="ns3:_activity" minOccurs="0"/>
+                <xsd:element ref="ns3:MediaServiceSearchProperties" minOccurs="0"/>
+                <xsd:element ref="ns3:MediaServiceDateTaken" minOccurs="0"/>
+                <xsd:element ref="ns3:MediaServiceSystemTags" minOccurs="0"/>
+                <xsd:element ref="ns3:MediaServiceOCR" minOccurs="0"/>
+                <xsd:element ref="ns3:MediaServiceGenerationTime" minOccurs="0"/>
+                <xsd:element ref="ns3:MediaServiceEventHashCode" minOccurs="0"/>
+                <xsd:element ref="ns3:MediaLengthInSeconds" minOccurs="0"/>
+                <xsd:element ref="ns3:MediaServiceLocation" minOccurs="0"/>
+              </xsd:all>
+            </xsd:complexType>
+          </xsd:element>
+        </xsd:sequence>
+      </xsd:complexType>
+    </xsd:element>
+  </xsd:schema>
+  <xsd:schema xmlns:xsd="http://www.w3.org/2001/XMLSchema" xmlns:xs="http://www.w3.org/2001/XMLSchema" xmlns:dms="http://schemas.microsoft.com/office/2006/documentManagement/types" xmlns:pc="http://schemas.microsoft.com/office/infopath/2007/PartnerControls" targetNamespace="1fa6e5a6-829c-4781-a3ea-170c3654358c" elementFormDefault="qualified">
+    <xsd:import namespace="http://schemas.microsoft.com/office/2006/documentManagement/types"/>
+    <xsd:import namespace="http://schemas.microsoft.com/office/infopath/2007/PartnerControls"/>
+    <xsd:element name="MediaServiceMetadata" ma:index="8" nillable="true" ma:displayName="MediaServiceMetadata" ma:hidden="true" ma:internalName="MediaServiceMetadata" ma:readOnly="true">
+      <xsd:simpleType>
+        <xsd:restriction base="dms:Note"/>
+      </xsd:simpleType>
+    </xsd:element>
+    <xsd:element name="MediaServiceFastMetadata" ma:index="9" nillable="true" ma:displayName="MediaServiceFastMetadata" ma:hidden="true" ma:internalName="MediaServiceFastMetadata" ma:readOnly="true">
+      <xsd:simpleType>
+        <xsd:restriction base="dms:Note"/>
+      </xsd:simpleType>
+    </xsd:element>
+    <xsd:element name="MediaServiceObjectDetectorVersions" ma:index="10" nillable="true" ma:displayName="MediaServiceObjectDetectorVersions" ma:hidden="true" ma:indexed="true" ma:internalName="MediaServiceObjectDetectorVersions" ma:readOnly="true">
+      <xsd:simpleType>
+        <xsd:restriction base="dms:Text"/>
+      </xsd:simpleType>
+    </xsd:element>
+    <xsd:element name="_activity" ma:index="11" nillable="true" ma:displayName="_activity" ma:hidden="true" ma:internalName="_activity">
+      <xsd:simpleType>
+        <xsd:restriction base="dms:Note"/>
+      </xsd:simpleType>
+    </xsd:element>
+    <xsd:element name="MediaServiceSearchProperties" ma:index="12" nillable="true" ma:displayName="MediaServiceSearchProperties" ma:hidden="true" ma:internalName="MediaServiceSearchProperties" ma:readOnly="true">
+      <xsd:simpleType>
+        <xsd:restriction base="dms:Note"/>
+      </xsd:simpleType>
+    </xsd:element>
+    <xsd:element name="MediaServiceDateTaken" ma:index="13" nillable="true" ma:displayName="MediaServiceDateTaken" ma:hidden="true" ma:indexed="true" ma:internalName="MediaServiceDateTaken" ma:readOnly="true">
+      <xsd:simpleType>
+        <xsd:restriction base="dms:Text"/>
+      </xsd:simpleType>
+    </xsd:element>
+    <xsd:element name="MediaServiceSystemTags" ma:index="14" nillable="true" ma:displayName="MediaServiceSystemTags" ma:hidden="true" ma:internalName="MediaServiceSystemTags" ma:readOnly="true">
+      <xsd:simpleType>
+        <xsd:restriction base="dms:Note"/>
+      </xsd:simpleType>
+    </xsd:element>
+    <xsd:element name="MediaServiceOCR" ma:index="15" nillable="true" ma:displayName="Extracted Text" ma:internalName="MediaServiceOCR" ma:readOnly="true">
+      <xsd:simpleType>
+        <xsd:restriction base="dms:Note">
+          <xsd:maxLength value="255"/>
+        </xsd:restriction>
+      </xsd:simpleType>
+    </xsd:element>
+    <xsd:element name="MediaServiceGenerationTime" ma:index="16" nillable="true" ma:displayName="MediaServiceGenerationTime" ma:hidden="true" ma:internalName="MediaServiceGenerationTime" ma:readOnly="true">
+      <xsd:simpleType>
+        <xsd:restriction base="dms:Text"/>
+      </xsd:simpleType>
+    </xsd:element>
+    <xsd:element name="MediaServiceEventHashCode" ma:index="17" nillable="true" ma:displayName="MediaServiceEventHashCode" ma:hidden="true" ma:internalName="MediaServiceEventHashCode" ma:readOnly="true">
+      <xsd:simpleType>
+        <xsd:restriction base="dms:Text"/>
+      </xsd:simpleType>
+    </xsd:element>
+    <xsd:element name="MediaLengthInSeconds" ma:index="18" nillable="true" ma:displayName="MediaLengthInSeconds" ma:hidden="true" ma:internalName="MediaLengthInSeconds" ma:readOnly="true">
+      <xsd:simpleType>
+        <xsd:restriction base="dms:Unknown"/>
+      </xsd:simpleType>
+    </xsd:element>
+    <xsd:element name="MediaServiceLocation" ma:index="19" nillable="true" ma:displayName="Location" ma:indexed="true" ma:internalName="MediaServiceLocation" ma:readOnly="true">
+      <xsd:simpleType>
+        <xsd:restriction base="dms:Text"/>
+      </xsd:simpleType>
+    </xsd:element>
+  </xsd:schema>
+  <xsd:schema xmlns="http://schemas.openxmlformats.org/package/2006/metadata/core-properties" xmlns:xsd="http://www.w3.org/2001/XMLSchema" xmlns:xsi="http://www.w3.org/2001/XMLSchema-instance" xmlns:dc="http://purl.org/dc/elements/1.1/" xmlns:dcterms="http://purl.org/dc/terms/" xmlns:odoc="http://schemas.microsoft.com/internal/obd" targetNamespace="http://schemas.openxmlformats.org/package/2006/metadata/core-properties" elementFormDefault="qualified" attributeFormDefault="unqualified" blockDefault="#all">
+    <xsd:import namespace="http://purl.org/dc/elements/1.1/" schemaLocation="http://dublincore.org/schemas/xmls/qdc/2003/04/02/dc.xsd"/>
+    <xsd:import namespace="http://purl.org/dc/terms/" schemaLocation="http://dublincore.org/schemas/xmls/qdc/2003/04/02/dcterms.xsd"/>
+    <xsd:element name="coreProperties" type="CT_coreProperties"/>
+    <xsd:complexType name="CT_coreProperties">
+      <xsd:all>
+        <xsd:element ref="dc:creator" minOccurs="0" maxOccurs="1"/>
+        <xsd:element ref="dcterms:created" minOccurs="0" maxOccurs="1"/>
+        <xsd:element ref="dc:identifier" minOccurs="0" maxOccurs="1"/>
+        <xsd:element name="contentType" minOccurs="0" maxOccurs="1" type="xsd:string" ma:index="0" ma:displayName="Content Type"/>
+        <xsd:element ref="dc:title" minOccurs="0" maxOccurs="1" ma:index="4" ma:displayName="Title"/>
+        <xsd:element ref="dc:subject" minOccurs="0" maxOccurs="1"/>
+        <xsd:element ref="dc:description" minOccurs="0" maxOccurs="1"/>
+        <xsd:element name="keywords" minOccurs="0" maxOccurs="1" type="xsd:string"/>
+        <xsd:element ref="dc:language" minOccurs="0" maxOccurs="1"/>
+        <xsd:element name="category" minOccurs="0" maxOccurs="1" type="xsd:string"/>
+        <xsd:element name="version" minOccurs="0" maxOccurs="1" type="xsd:string"/>
+        <xsd:element name="revision" minOccurs="0" maxOccurs="1" type="xsd:string">
+          <xsd:annotation>
+            <xsd:documentation>
+                        This value indicates the number of saves or revisions. The application is responsible for updating this value after each revision.
+                    </xsd:documentation>
+          </xsd:annotation>
+        </xsd:element>
+        <xsd:element name="lastModifiedBy" minOccurs="0" maxOccurs="1" type="xsd:string"/>
+        <xsd:element ref="dcterms:modified" minOccurs="0" maxOccurs="1"/>
+        <xsd:element name="contentStatus" minOccurs="0" maxOccurs="1" type="xsd:string"/>
+      </xsd:all>
+    </xsd:complexType>
+  </xsd:schema>
+  <xs:schema xmlns:pc="http://schemas.microsoft.com/office/infopath/2007/PartnerControls" xmlns:xs="http://www.w3.org/2001/XMLSchema" targetNamespace="http://schemas.microsoft.com/office/infopath/2007/PartnerControls" elementFormDefault="qualified" attributeFormDefault="unqualified">
+    <xs:element name="Person">
+      <xs:complexType>
+        <xs:sequence>
+          <xs:element ref="pc:DisplayName" minOccurs="0"/>
+          <xs:element ref="pc:AccountId" minOccurs="0"/>
+          <xs:element ref="pc:AccountType" minOccurs="0"/>
+        </xs:sequence>
+      </xs:complexType>
+    </xs:element>
+    <xs:element name="DisplayName" type="xs:string"/>
+    <xs:element name="AccountId" type="xs:string"/>
+    <xs:element name="AccountType" type="xs:string"/>
+    <xs:element name="BDCAssociatedEntity">
+      <xs:complexType>
+        <xs:sequence>
+          <xs:element ref="pc:BDCEntity" minOccurs="0" maxOccurs="unbounded"/>
+        </xs:sequence>
+        <xs:attribute ref="pc:EntityNamespace"/>
+        <xs:attribute ref="pc:EntityName"/>
+        <xs:attribute ref="pc:SystemInstanceName"/>
+        <xs:attribute ref="pc:AssociationName"/>
+      </xs:complexType>
+    </xs:element>
+    <xs:attribute name="EntityNamespace" type="xs:string"/>
+    <xs:attribute name="EntityName" type="xs:string"/>
+    <xs:attribute name="SystemInstanceName" type="xs:string"/>
+    <xs:attribute name="AssociationName" type="xs:string"/>
+    <xs:element name="BDCEntity">
+      <xs:complexType>
+        <xs:sequence>
+          <xs:element ref="pc:EntityDisplayName" minOccurs="0"/>
+          <xs:element ref="pc:EntityInstanceReference" minOccurs="0"/>
+          <xs:element ref="pc:EntityId1" minOccurs="0"/>
+          <xs:element ref="pc:EntityId2" minOccurs="0"/>
+          <xs:element ref="pc:EntityId3" minOccurs="0"/>
+          <xs:element ref="pc:EntityId4" minOccurs="0"/>
+          <xs:element ref="pc:EntityId5" minOccurs="0"/>
+        </xs:sequence>
+      </xs:complexType>
+    </xs:element>
+    <xs:element name="EntityDisplayName" type="xs:string"/>
+    <xs:element name="EntityInstanceReference" type="xs:string"/>
+    <xs:element name="EntityId1" type="xs:string"/>
+    <xs:element name="EntityId2" type="xs:string"/>
+    <xs:element name="EntityId3" type="xs:string"/>
+    <xs:element name="EntityId4" type="xs:string"/>
+    <xs:element name="EntityId5" type="xs:string"/>
+    <xs:element name="Terms">
+      <xs:complexType>
+        <xs:sequence>
+          <xs:element ref="pc:TermInfo" minOccurs="0" maxOccurs="unbounded"/>
+        </xs:sequence>
+      </xs:complexType>
+    </xs:element>
+    <xs:element name="TermInfo">
+      <xs:complexType>
+        <xs:sequence>
+          <xs:element ref="pc:TermName" minOccurs="0"/>
+          <xs:element ref="pc:TermId" minOccurs="0"/>
+        </xs:sequence>
+      </xs:complexType>
+    </xs:element>
+    <xs:element name="TermName" type="xs:string"/>
+    <xs:element name="TermId" type="xs:string"/>
+  </xs:schema>
+</ct:contentTypeSchema>
+</file>
+
+<file path=customXml/item2.xml><?xml version="1.0" encoding="utf-8"?>
+<?mso-contentType ?>
+<FormTemplates xmlns="http://schemas.microsoft.com/sharepoint/v3/contenttype/forms">
+  <Display>DocumentLibraryForm</Display>
+  <Edit>DocumentLibraryForm</Edit>
+  <New>DocumentLibraryForm</New>
+</FormTemplates>
+</file>
+
+<file path=customXml/item3.xml><?xml version="1.0" encoding="utf-8"?>
+<p:properties xmlns:p="http://schemas.microsoft.com/office/2006/metadata/properties" xmlns:xsi="http://www.w3.org/2001/XMLSchema-instance" xmlns:pc="http://schemas.microsoft.com/office/infopath/2007/PartnerControls">
+  <documentManagement>
+    <_activity xmlns="1fa6e5a6-829c-4781-a3ea-170c3654358c" xsi:nil="true"/>
+  </documentManagement>
+</p:properties>
+</file>
+
+<file path=customXml/itemProps1.xml><?xml version="1.0" encoding="utf-8"?>
+<ds:datastoreItem xmlns:ds="http://schemas.openxmlformats.org/officeDocument/2006/customXml" ds:itemID="{7D7AAEDE-5A82-477E-85D9-FF908D96ADE4}">
+  <ds:schemaRefs>
+    <ds:schemaRef ds:uri="http://schemas.microsoft.com/office/2006/metadata/contentType"/>
+    <ds:schemaRef ds:uri="http://schemas.microsoft.com/office/2006/metadata/properties/metaAttributes"/>
+    <ds:schemaRef ds:uri="http://www.w3.org/2001/XMLSchema"/>
+    <ds:schemaRef ds:uri="http://schemas.microsoft.com/office/2006/metadata/properties"/>
+    <ds:schemaRef ds:uri="1fa6e5a6-829c-4781-a3ea-170c3654358c"/>
+    <ds:schemaRef ds:uri="http://schemas.microsoft.com/office/2006/documentManagement/types"/>
+    <ds:schemaRef ds:uri="http://schemas.microsoft.com/office/infopath/2007/PartnerControls"/>
+    <ds:schemaRef ds:uri="http://schemas.openxmlformats.org/package/2006/metadata/core-properties"/>
+    <ds:schemaRef ds:uri="http://purl.org/dc/elements/1.1/"/>
+    <ds:schemaRef ds:uri="http://purl.org/dc/terms/"/>
+    <ds:schemaRef ds:uri="http://schemas.microsoft.com/internal/obd"/>
+  </ds:schemaRefs>
+</ds:datastoreItem>
+</file>
+
+<file path=customXml/itemProps2.xml><?xml version="1.0" encoding="utf-8"?>
+<ds:datastoreItem xmlns:ds="http://schemas.openxmlformats.org/officeDocument/2006/customXml" ds:itemID="{A1D11F1C-7620-42FD-BF37-3B0EC4D761C9}">
+  <ds:schemaRefs>
+    <ds:schemaRef ds:uri="http://schemas.microsoft.com/sharepoint/v3/contenttype/forms"/>
+  </ds:schemaRefs>
+</ds:datastoreItem>
+</file>
+
+<file path=customXml/itemProps3.xml><?xml version="1.0" encoding="utf-8"?>
+<ds:datastoreItem xmlns:ds="http://schemas.openxmlformats.org/officeDocument/2006/customXml" ds:itemID="{6C198DE5-6237-46A7-97AC-5EEDE0F69F3E}">
+  <ds:schemaRefs>
+    <ds:schemaRef ds:uri="http://purl.org/dc/elements/1.1/"/>
+    <ds:schemaRef ds:uri="http://schemas.openxmlformats.org/package/2006/metadata/core-properties"/>
+    <ds:schemaRef ds:uri="http://schemas.microsoft.com/office/2006/documentManagement/types"/>
+    <ds:schemaRef ds:uri="http://schemas.microsoft.com/office/infopath/2007/PartnerControls"/>
+    <ds:schemaRef ds:uri="1fa6e5a6-829c-4781-a3ea-170c3654358c"/>
+    <ds:schemaRef ds:uri="http://schemas.microsoft.com/office/2006/metadata/properties"/>
+    <ds:schemaRef ds:uri="http://www.w3.org/XML/1998/namespace"/>
+    <ds:schemaRef ds:uri="http://purl.org/dc/dcmitype/"/>
+    <ds:schemaRef ds:uri="http://purl.org/dc/terms/"/>
+  </ds:schemaRefs>
+</ds:datastoreItem>
 </file>
--- a/rooted_slides.pptx
+++ b/rooted_slides.pptx
@@ -114,35 +114,6 @@
     </p:ext>
   </p:extLst>
 </p:presentation>
-</file>
-
-<file path=ppt/revisionInfo.xml><?xml version="1.0" encoding="utf-8"?>
-<p1510:revInfo xmlns:a="http://schemas.openxmlformats.org/drawingml/2006/main" xmlns:r="http://schemas.openxmlformats.org/officeDocument/2006/relationships" xmlns:p1510="http://schemas.microsoft.com/office/powerpoint/2015/10/main">
-  <p1510:revLst>
-    <p1510:client id="{C3705DE9-7EB7-4545-BEE0-93706622BEA1}" v="2" dt="2026-10-15T19:04:30.754"/>
-  </p1510:revLst>
-</p1510:revInfo>
-</file>
-
-<file path=ppt/changesInfos/changesInfo1.xml><?xml version="1.0" encoding="utf-8"?>
-<pc:chgInfo xmlns:a="http://schemas.openxmlformats.org/drawingml/2006/main" xmlns:r="http://schemas.openxmlformats.org/officeDocument/2006/relationships" xmlns:ac="http://schemas.microsoft.com/office/drawing/2013/main/command" xmlns:pc="http://schemas.microsoft.com/office/powerpoint/2013/main/command">
-  <pc:docChgLst>
-    <pc:chgData name="Lian, Brenton" userId="e0b78948-1dca-4480-ac23-0bfd98d5596f" providerId="ADAL" clId="{4C6CE92E-4DA1-4337-9B1A-3D391919FAEA}"/>
-    <pc:docChg chg="addSld modSld">
-      <pc:chgData name="Lian, Brenton" userId="e0b78948-1dca-4480-ac23-0bfd98d5596f" providerId="ADAL" clId="{4C6CE92E-4DA1-4337-9B1A-3D391919FAEA}" dt="2026-10-15T19:04:21.978" v="0"/>
-      <pc:docMkLst>
-        <pc:docMk/>
-      </pc:docMkLst>
-      <pc:sldChg chg="add">
-        <pc:chgData name="Lian, Brenton" userId="e0b78948-1dca-4480-ac23-0bfd98d5596f" providerId="ADAL" clId="{4C6CE92E-4DA1-4337-9B1A-3D391919FAEA}" dt="2026-10-15T19:04:21.978" v="0"/>
-        <pc:sldMkLst>
-          <pc:docMk/>
-          <pc:sldMk cId="0" sldId="267"/>
-        </pc:sldMkLst>
-      </pc:sldChg>
-    </pc:docChg>
-  </pc:docChgLst>
-</pc:chgInfo>
 </file>
 
 <file path=ppt/notesMasters/notesMaster1.xml><?xml version="1.0" encoding="utf-8"?>
@@ -4999,7 +4970,7 @@
           <a:p>
             <a:pPr algn="l"/>
             <a:r>
-              <a:rPr sz="1570" b="1">
+              <a:rPr sz="1570" b="1" dirty="0">
                 <a:solidFill>
                   <a:srgbClr val="0F1B2D"/>
                 </a:solidFill>
@@ -5019,7 +4990,7 @@
         <p:spPr>
           <a:xfrm>
             <a:off x="8869680" y="3465576"/>
-            <a:ext cx="2587752" cy="393192"/>
+            <a:ext cx="2587752" cy="353943"/>
           </a:xfrm>
           <a:prstGeom prst="rect">
             <a:avLst/>
@@ -5034,13 +5005,31 @@
           <a:p>
             <a:pPr algn="l"/>
             <a:r>
-              <a:rPr sz="1150" b="0">
+              <a:rPr sz="1150" b="0" dirty="0">
                 <a:solidFill>
                   <a:srgbClr val="3B4656"/>
                 </a:solidFill>
                 <a:latin typeface="Noto Sans"/>
               </a:rPr>
-              <a:t>Cloud Storage + Firestore;
+              <a:t>Cloud Storage +</a:t>
+            </a:r>
+            <a:r>
+              <a:rPr lang="en-US" sz="1150" dirty="0">
+                <a:solidFill>
+                  <a:srgbClr val="3B4656"/>
+                </a:solidFill>
+                <a:latin typeface="Noto Sans"/>
+              </a:rPr>
+              <a:t> Redis</a:t>
+            </a:r>
+            <a:r>
+              <a:rPr sz="1150" b="0" dirty="0">
+                <a:solidFill>
+                  <a:srgbClr val="3B4656"/>
+                </a:solidFill>
+                <a:latin typeface="Noto Sans"/>
+              </a:rPr>
+              <a:t>;
 versioned, reviewed content.</a:t>
             </a:r>
           </a:p>

--- a/rooted_slides.pptx
+++ b/rooted_slides.pptx
@@ -461,7 +461,7 @@
           <a:p>
             <a:r>
               <a:rPr lang="en-US" dirty="0"/>
-              <a:t>Suggested time: 80 seconds. This full-slide vector diagram is the supplied architecture-mvp.svg. Left: user browser contains the profile, learning line, game, localized UI and browser storage. Center: Next.js serves static shell and a validated lesson endpoint with cache/fallback. Right: provider adapter. Bottom: schema-validated Git JSON content, build-time pipelines and CI. Vertex AI in the EU is explicitly a production target, not deployed in the MVP.</a:t>
+              <a:t>Suggested time: 80 seconds. Production target on Google Cloud (EU): a plan, not built in the MVP. Left to right: anonymous learners, the edge (Cloud CDN caches approved lessons, Cloud Armor filters traffic), Cloud Run running the same Next.js code, and Vertex AI on an EU endpoint. Data: Cloud Storage holds the versioned lesson catalog with a Redis cache in front; Cloud Tasks queues AI drafts so no learner waits on a live model call; BigQuery receives anonymized events only. Same plan as slide 5: launch in one region, add failover and bank SSO as demand grows. Bottom: zero-trust perimeter, content released separately from code with four-eyes review, and a DevSecOps pipeline.</a:t>
             </a:r>
           </a:p>
         </p:txBody>
@@ -634,7 +634,7 @@
           <a:lstStyle/>
           <a:p>
             <a:r>
-              <a:t>Enterprise scalability strategy (proposed, not MVP): Keep the deterministic game, budgeting inputs, and profile in the browser to avoid scaling a stateful game backend. Deploy a containerized, stateless Next.js API to autoscaling Cloud Run behind an HTTPS load balancer, Cloud CDN and Cloud Armor. Serve approved lesson objects from cache and a shared versioned catalog (Cloud Storage + Firestore). Generate and translate lessons asynchronously with Cloud Tasks and a hosted model in the appropriate data-residency region; apply schema checks, source attribution, and human financial-content review before publication. Enterprise guardrails: least-privilege IAM, secrets, observability, error and latency SLOs, rate/instance caps, canary deployments and rollback. Start in one EU region and add failover and enterprise SSO based on requirements and demand. Public lesson caching never includes individual financial inputs. This is an architecture proposal, not a claim of deployed infrastructure.</a:t>
+              <a:t>Enterprise scalability strategy (proposed, not MVP): Keep the deterministic game, budgeting inputs, and profile in the browser to avoid scaling a stateful game backend. Deploy a containerized, stateless Next.js API to autoscaling Cloud Run behind an HTTPS load balancer, Cloud CDN and Cloud Armor. Serve approved lesson objects from cache and a shared versioned catalog (Cloud Storage + Redis). Generate and translate lessons asynchronously with Cloud Tasks and a hosted model in the appropriate data-residency region; apply schema checks, source attribution, and human financial-content review before publication. Enterprise guardrails: least-privilege IAM, secrets, observability, error and latency SLOs, rate/instance caps, canary deployments and rollback. Start in one EU region and add failover and enterprise SSO based on requirements and demand. Public lesson caching never includes individual financial inputs. This is an architecture proposal, not a claim of deployed infrastructure.</a:t>
             </a:r>
           </a:p>
         </p:txBody>
@@ -3200,8 +3200,8 @@
         </p:blipFill>
         <p:spPr>
           <a:xfrm>
-            <a:off x="0" y="-372026"/>
-            <a:ext cx="12191970" cy="7602052"/>
+            <a:off x="596660" y="0"/>
+            <a:ext cx="10998679" cy="6858000"/>
           </a:xfrm>
           <a:prstGeom prst="rect">
             <a:avLst/>
